--- a/lecons/F4/50_F4_M2_L40_The_Management_of_Forest_Resources_in_Cameroon.pptx
+++ b/lecons/F4/50_F4_M2_L40_The_Management_of_Forest_Resources_in_Cameroon.pptx
@@ -13167,7 +13167,7 @@
         <p:spPr>
           <a:xfrm>
             <a:off x="0" y="658368"/>
-            <a:ext cx="3840480" cy="5833872"/>
+            <a:ext cx="5120640" cy="5833872"/>
           </a:xfrm>
           <a:prstGeom prst="rect">
             <a:avLst/>
@@ -13182,8 +13182,8 @@
         </p:nvSpPr>
         <p:spPr>
           <a:xfrm>
-            <a:off x="4069080" y="1005840"/>
-            <a:ext cx="7802575" cy="731520"/>
+            <a:off x="5349240" y="1005840"/>
+            <a:ext cx="6522415" cy="731520"/>
           </a:xfrm>
           <a:prstGeom prst="rect">
             <a:avLst/>
@@ -13223,8 +13223,8 @@
         </p:nvSpPr>
         <p:spPr>
           <a:xfrm>
-            <a:off x="4069080" y="1783080"/>
-            <a:ext cx="7802575" cy="4663440"/>
+            <a:off x="5349240" y="1783080"/>
+            <a:ext cx="6522415" cy="4663440"/>
           </a:xfrm>
           <a:prstGeom prst="rect">
             <a:avLst/>
@@ -13243,7 +13243,7 @@
               <a:buNone/>
             </a:pPr>
             <a:r>
-              <a:rPr lang="en-US" sz="4000" b="1" dirty="0">
+              <a:rPr lang="en-US" sz="3200" b="1" dirty="0">
                 <a:solidFill>
                   <a:srgbClr val="111111"/>
                 </a:solidFill>
@@ -13253,7 +13253,7 @@
               </a:rPr>
               <a:t>Topic: Management of Primary Resources</a:t>
             </a:r>
-            <a:endParaRPr lang="en-US" sz="4000" dirty="0"/>
+            <a:endParaRPr lang="en-US" sz="3200" dirty="0"/>
           </a:p>
           <a:p>
             <a:pPr algn="l" indent="0" marL="0">
@@ -13263,7 +13263,7 @@
               <a:buNone/>
             </a:pPr>
             <a:r>
-              <a:rPr lang="en-US" sz="4000" b="1" dirty="0">
+              <a:rPr lang="en-US" sz="3200" b="1" dirty="0">
                 <a:solidFill>
                   <a:srgbClr val="111111"/>
                 </a:solidFill>
@@ -13273,7 +13273,7 @@
               </a:rPr>
               <a:t>Sub-topic: The Economic Development Potentials of Cameroon in the Primary Sector: Forestry</a:t>
             </a:r>
-            <a:endParaRPr lang="en-US" sz="4000" dirty="0"/>
+            <a:endParaRPr lang="en-US" sz="3200" dirty="0"/>
           </a:p>
           <a:p>
             <a:pPr algn="l" indent="0" marL="0">
@@ -13283,7 +13283,7 @@
               <a:buNone/>
             </a:pPr>
             <a:r>
-              <a:rPr lang="en-US" sz="4000" b="1" dirty="0">
+              <a:rPr lang="en-US" sz="3200" b="1" dirty="0">
                 <a:solidFill>
                   <a:srgbClr val="990011"/>
                 </a:solidFill>
@@ -13293,7 +13293,7 @@
               </a:rPr>
               <a:t>Lesson 40: The Management of Forest Resources in Cameroon</a:t>
             </a:r>
-            <a:endParaRPr lang="en-US" sz="4000" dirty="0"/>
+            <a:endParaRPr lang="en-US" sz="3200" dirty="0"/>
           </a:p>
         </p:txBody>
       </p:sp>

--- a/lecons/F4/50_F4_M2_L40_The_Management_of_Forest_Resources_in_Cameroon.pptx
+++ b/lecons/F4/50_F4_M2_L40_The_Management_of_Forest_Resources_in_Cameroon.pptx
@@ -56,9 +56,15 @@
     <p:sldId id="304" r:id="rId50"/>
     <p:sldId id="305" r:id="rId51"/>
     <p:sldId id="306" r:id="rId52"/>
+    <p:sldId id="307" r:id="rId53"/>
+    <p:sldId id="308" r:id="rId54"/>
+    <p:sldId id="309" r:id="rId55"/>
+    <p:sldId id="310" r:id="rId56"/>
+    <p:sldId id="311" r:id="rId57"/>
+    <p:sldId id="312" r:id="rId58"/>
   </p:sldIdLst>
   <p:notesMasterIdLst>
-    <p:notesMasterId r:id="rId53"/>
+    <p:notesMasterId r:id="rId59"/>
   </p:notesMasterIdLst>
   <p:sldSz cx="12192000" cy="6858000"/>
   <p:notesSz cx="6858000" cy="12192000"/>
@@ -3192,7 +3198,7 @@
           <a:p>
             <a:r>
               <a:rPr lang="en-US" dirty="0"/>
-              <a:t>Let us copy Methods of Exploitation and Importance. Forests are exploited as follows. On this slide we have Methods and Importance. Write each point on a new line, with the key term first, and explain it in your own words when we revise.</a:t>
+              <a:t>Let us copy Methods of Exploitation. Forests are exploited by the following methods. On this slide we have Prospecting and Felling. Write each point on a new line, with the key term first, and explain it in your own words when we revise. When you finish, we go to the next slide.</a:t>
             </a:r>
             <a:endParaRPr lang="en-US" dirty="0"/>
           </a:p>
@@ -3280,7 +3286,7 @@
           <a:p>
             <a:r>
               <a:rPr lang="en-US" dirty="0"/>
-              <a:t>Let us copy Problems and Conservation Efforts. Forestry faces problems and conservation efforts. On this slide we have Problems and Efforts. Write each point on a new line, with the key term first, and explain it in your own words when we revise.</a:t>
+              <a:t>We continue with Methods of Exploitation. On this slide we have Transport. Write each point on a new line, with the key term first, and explain it in your own words when we revise.</a:t>
             </a:r>
             <a:endParaRPr lang="en-US" dirty="0"/>
           </a:p>
@@ -3368,7 +3374,7 @@
           <a:p>
             <a:r>
               <a:rPr lang="en-US" dirty="0"/>
-              <a:t>Now let us check what you have understood. Question 1: Where are the main forests of Cameroon? Answer in your exercise book.</a:t>
+              <a:t>Let us copy Importance. Forestry is important for the following reasons. On this slide we have Jobs and Export income. Write each point on a new line, with the key term first, and explain it in your own words when we revise. When you finish, we go to the next slide.</a:t>
             </a:r>
             <a:endParaRPr lang="en-US" dirty="0"/>
           </a:p>
@@ -3544,7 +3550,7 @@
           <a:p>
             <a:r>
               <a:rPr lang="en-US" dirty="0"/>
-              <a:t>The expected answer is: in the South, East and Centre. If you got it right, well done.</a:t>
+              <a:t>We continue with Importance. On this slide we have Building materials. Write each point on a new line, with the key term first, and explain it in your own words when we revise.</a:t>
             </a:r>
             <a:endParaRPr lang="en-US" dirty="0"/>
           </a:p>
@@ -3632,7 +3638,7 @@
           <a:p>
             <a:r>
               <a:rPr lang="en-US" dirty="0"/>
-              <a:t>Now let us check what you have understood. Question 2: Give two conservation efforts. Answer in your exercise book.</a:t>
+              <a:t>Let us copy Problems. Forest exploitation faces the following problems. On this slide we have Illegal logging and Poor roads. Write each point on a new line, with the key term first, and explain it in your own words when we revise. When you finish, we go to the next slide.</a:t>
             </a:r>
             <a:endParaRPr lang="en-US" dirty="0"/>
           </a:p>
@@ -3720,7 +3726,7 @@
           <a:p>
             <a:r>
               <a:rPr lang="en-US" dirty="0"/>
-              <a:t>The expected answer is: the Forestry Law and protected areas. If you got it right, well done.</a:t>
+              <a:t>We continue with Problems. On this slide we have Scattered valuable trees and Deforestation. Write each point on a new line, with the key term first, and explain it in your own words when we revise.</a:t>
             </a:r>
             <a:endParaRPr lang="en-US" dirty="0"/>
           </a:p>
@@ -3808,7 +3814,7 @@
           <a:p>
             <a:r>
               <a:rPr lang="en-US" dirty="0"/>
-              <a:t>Take your time to copy this part; we will continue together.</a:t>
+              <a:t>Let us copy Conservation Efforts. The forests are conserved by the following efforts. On this slide we have The Forestry Law of 1994 and Management plans. Write each point on a new line, with the key term first, and explain it in your own words when we revise. When you finish, we go to the next slide.</a:t>
             </a:r>
             <a:endParaRPr lang="en-US" dirty="0"/>
           </a:p>
@@ -3896,7 +3902,7 @@
           <a:p>
             <a:r>
               <a:rPr lang="en-US" dirty="0"/>
-              <a:t>For those who need more practice, fill in the blanks in your exercise book. The answers are: number 1, illegal; number 2, 1994; number 3, Douala.</a:t>
+              <a:t>We continue with Conservation Efforts. On this slide we have Reforestation and Protected areas. Write each point on a new line, with the key term first, and explain it in your own words when we revise.</a:t>
             </a:r>
             <a:endParaRPr lang="en-US" dirty="0"/>
           </a:p>
@@ -3984,7 +3990,7 @@
           <a:p>
             <a:r>
               <a:rPr lang="en-US" dirty="0"/>
-              <a:t>For your homework: Name three valuable trees of the forests of Cameroon and one use of each. We shall correct it at the beginning of our next lesson.</a:t>
+              <a:t>Now let us check what you have understood. Question 1: Where are the main forests of Cameroon? Answer in your exercise book.</a:t>
             </a:r>
             <a:endParaRPr lang="en-US" dirty="0"/>
           </a:p>
@@ -4072,7 +4078,7 @@
           <a:p>
             <a:r>
               <a:rPr lang="en-US" dirty="0"/>
-              <a:t>Our next lesson will be on Further Study 2: Deforestation in Cameroon and its Consequences. Thank you for your attention, and see you next time.</a:t>
+              <a:t>The expected answer is: in the South, East and Centre. If you got it right, well done.</a:t>
             </a:r>
             <a:endParaRPr lang="en-US" dirty="0"/>
           </a:p>
@@ -4160,7 +4166,7 @@
           <a:p>
             <a:r>
               <a:rPr lang="en-US" dirty="0"/>
-              <a:t>Let us play the bilingual game. I say a word in English, and you give me the French word. Then we do the reverse.</a:t>
+              <a:t>Now let us check what you have understood. Question 2: Give two conservation efforts. Answer in your exercise book.</a:t>
             </a:r>
             <a:endParaRPr lang="en-US" dirty="0"/>
           </a:p>
@@ -4248,7 +4254,7 @@
           <a:p>
             <a:r>
               <a:rPr lang="en-US" dirty="0"/>
-              <a:t>I record this information in the official logbook of the class after the lesson.</a:t>
+              <a:t>The expected answer is: the Forestry Law and protected areas. If you got it right, well done.</a:t>
             </a:r>
             <a:endParaRPr lang="en-US" dirty="0"/>
           </a:p>
@@ -4336,7 +4342,7 @@
           <a:p>
             <a:r>
               <a:rPr lang="en-US" dirty="0"/>
-              <a:t>I complete the second page of the logbook: the matter taught, the evaluation, the homework and the attendance.</a:t>
+              <a:t>Take your time to copy this part; we will continue together.</a:t>
             </a:r>
             <a:endParaRPr lang="en-US" dirty="0"/>
           </a:p>
@@ -4512,7 +4518,7 @@
           <a:p>
             <a:r>
               <a:rPr lang="en-US" dirty="0"/>
-              <a:t>This slide is for me, the teacher: it gives the timing of the lesson and what to do if the projector is not available.</a:t>
+              <a:t>For those who need more practice, fill in the blanks in your exercise book. The answers are: number 1, illegal; number 2, 1994; number 3, Douala.</a:t>
             </a:r>
             <a:endParaRPr lang="en-US" dirty="0"/>
           </a:p>
@@ -4600,7 +4606,7 @@
           <a:p>
             <a:r>
               <a:rPr lang="en-US" dirty="0"/>
-              <a:t>These are the references and picture credits used to prepare this lesson.</a:t>
+              <a:t>For your homework: Name three valuable trees of the forests of Cameroon and one use of each. We shall correct it at the beginning of our next lesson.</a:t>
             </a:r>
             <a:endParaRPr lang="en-US" dirty="0"/>
           </a:p>
@@ -4624,6 +4630,534 @@
             <a:fld id="{F7021451-1387-4CA6-816F-3879F97B5CBC}" type="slidenum">
               <a:rPr lang="en-US"/>
               <a:t>51</a:t>
+            </a:fld>
+            <a:endParaRPr lang="en-US"/>
+          </a:p>
+        </p:txBody>
+      </p:sp>
+    </p:spTree>
+    <p:extLst>
+      <p:ext uri="{BB962C8B-B14F-4D97-AF65-F5344CB8AC3E}">
+        <p14:creationId xmlns:p14="http://schemas.microsoft.com/office/powerpoint/2010/main" val="1024086991"/>
+      </p:ext>
+    </p:extLst>
+  </p:cSld>
+  <p:clrMapOvr>
+    <a:masterClrMapping/>
+  </p:clrMapOvr>
+</p:notes>
+</file>
+
+<file path=ppt/notesSlides/notesSlide52.xml><?xml version="1.0" encoding="utf-8"?>
+<p:notes xmlns:a="http://schemas.openxmlformats.org/drawingml/2006/main" xmlns:r="http://schemas.openxmlformats.org/officeDocument/2006/relationships" xmlns:p="http://schemas.openxmlformats.org/presentationml/2006/main">
+  <p:cSld>
+    <p:spTree>
+      <p:nvGrpSpPr>
+        <p:cNvPr id="1" name=""/>
+        <p:cNvGrpSpPr/>
+        <p:nvPr/>
+      </p:nvGrpSpPr>
+      <p:grpSpPr>
+        <a:xfrm>
+          <a:off x="0" y="0"/>
+          <a:ext cx="0" cy="0"/>
+          <a:chOff x="0" y="0"/>
+          <a:chExt cx="0" cy="0"/>
+        </a:xfrm>
+      </p:grpSpPr>
+      <p:sp>
+        <p:nvSpPr>
+          <p:cNvPr id="2" name="Slide Image Placeholder 1"/>
+          <p:cNvSpPr>
+            <a:spLocks noGrp="1" noRot="1" noChangeAspect="1"/>
+          </p:cNvSpPr>
+          <p:nvPr>
+            <p:ph type="sldImg"/>
+          </p:nvPr>
+        </p:nvSpPr>
+        <p:spPr/>
+      </p:sp>
+      <p:sp>
+        <p:nvSpPr>
+          <p:cNvPr id="3" name="Notes Placeholder 2"/>
+          <p:cNvSpPr>
+            <a:spLocks noGrp="1"/>
+          </p:cNvSpPr>
+          <p:nvPr>
+            <p:ph type="body" idx="1"/>
+          </p:nvPr>
+        </p:nvSpPr>
+        <p:spPr/>
+        <p:txBody>
+          <a:bodyPr/>
+          <a:lstStyle/>
+          <a:p>
+            <a:r>
+              <a:rPr lang="en-US" dirty="0"/>
+              <a:t>Our next lesson will be on Further Study 2: Deforestation in Cameroon and its Consequences. Thank you for your attention, and see you next time.</a:t>
+            </a:r>
+            <a:endParaRPr lang="en-US" dirty="0"/>
+          </a:p>
+        </p:txBody>
+      </p:sp>
+      <p:sp>
+        <p:nvSpPr>
+          <p:cNvPr id="4" name="Slide Number Placeholder 3"/>
+          <p:cNvSpPr>
+            <a:spLocks noGrp="1"/>
+          </p:cNvSpPr>
+          <p:nvPr>
+            <p:ph type="sldNum" sz="quarter" idx="10"/>
+          </p:nvPr>
+        </p:nvSpPr>
+        <p:spPr/>
+        <p:txBody>
+          <a:bodyPr/>
+          <a:lstStyle/>
+          <a:p>
+            <a:fld id="{F7021451-1387-4CA6-816F-3879F97B5CBC}" type="slidenum">
+              <a:rPr lang="en-US"/>
+              <a:t>52</a:t>
+            </a:fld>
+            <a:endParaRPr lang="en-US"/>
+          </a:p>
+        </p:txBody>
+      </p:sp>
+    </p:spTree>
+    <p:extLst>
+      <p:ext uri="{BB962C8B-B14F-4D97-AF65-F5344CB8AC3E}">
+        <p14:creationId xmlns:p14="http://schemas.microsoft.com/office/powerpoint/2010/main" val="1024086991"/>
+      </p:ext>
+    </p:extLst>
+  </p:cSld>
+  <p:clrMapOvr>
+    <a:masterClrMapping/>
+  </p:clrMapOvr>
+</p:notes>
+</file>
+
+<file path=ppt/notesSlides/notesSlide53.xml><?xml version="1.0" encoding="utf-8"?>
+<p:notes xmlns:a="http://schemas.openxmlformats.org/drawingml/2006/main" xmlns:r="http://schemas.openxmlformats.org/officeDocument/2006/relationships" xmlns:p="http://schemas.openxmlformats.org/presentationml/2006/main">
+  <p:cSld>
+    <p:spTree>
+      <p:nvGrpSpPr>
+        <p:cNvPr id="1" name=""/>
+        <p:cNvGrpSpPr/>
+        <p:nvPr/>
+      </p:nvGrpSpPr>
+      <p:grpSpPr>
+        <a:xfrm>
+          <a:off x="0" y="0"/>
+          <a:ext cx="0" cy="0"/>
+          <a:chOff x="0" y="0"/>
+          <a:chExt cx="0" cy="0"/>
+        </a:xfrm>
+      </p:grpSpPr>
+      <p:sp>
+        <p:nvSpPr>
+          <p:cNvPr id="2" name="Slide Image Placeholder 1"/>
+          <p:cNvSpPr>
+            <a:spLocks noGrp="1" noRot="1" noChangeAspect="1"/>
+          </p:cNvSpPr>
+          <p:nvPr>
+            <p:ph type="sldImg"/>
+          </p:nvPr>
+        </p:nvSpPr>
+        <p:spPr/>
+      </p:sp>
+      <p:sp>
+        <p:nvSpPr>
+          <p:cNvPr id="3" name="Notes Placeholder 2"/>
+          <p:cNvSpPr>
+            <a:spLocks noGrp="1"/>
+          </p:cNvSpPr>
+          <p:nvPr>
+            <p:ph type="body" idx="1"/>
+          </p:nvPr>
+        </p:nvSpPr>
+        <p:spPr/>
+        <p:txBody>
+          <a:bodyPr/>
+          <a:lstStyle/>
+          <a:p>
+            <a:r>
+              <a:rPr lang="en-US" dirty="0"/>
+              <a:t>Let us play the bilingual game. I say a word in English, and you give me the French word. Then we do the reverse.</a:t>
+            </a:r>
+            <a:endParaRPr lang="en-US" dirty="0"/>
+          </a:p>
+        </p:txBody>
+      </p:sp>
+      <p:sp>
+        <p:nvSpPr>
+          <p:cNvPr id="4" name="Slide Number Placeholder 3"/>
+          <p:cNvSpPr>
+            <a:spLocks noGrp="1"/>
+          </p:cNvSpPr>
+          <p:nvPr>
+            <p:ph type="sldNum" sz="quarter" idx="10"/>
+          </p:nvPr>
+        </p:nvSpPr>
+        <p:spPr/>
+        <p:txBody>
+          <a:bodyPr/>
+          <a:lstStyle/>
+          <a:p>
+            <a:fld id="{F7021451-1387-4CA6-816F-3879F97B5CBC}" type="slidenum">
+              <a:rPr lang="en-US"/>
+              <a:t>53</a:t>
+            </a:fld>
+            <a:endParaRPr lang="en-US"/>
+          </a:p>
+        </p:txBody>
+      </p:sp>
+    </p:spTree>
+    <p:extLst>
+      <p:ext uri="{BB962C8B-B14F-4D97-AF65-F5344CB8AC3E}">
+        <p14:creationId xmlns:p14="http://schemas.microsoft.com/office/powerpoint/2010/main" val="1024086991"/>
+      </p:ext>
+    </p:extLst>
+  </p:cSld>
+  <p:clrMapOvr>
+    <a:masterClrMapping/>
+  </p:clrMapOvr>
+</p:notes>
+</file>
+
+<file path=ppt/notesSlides/notesSlide54.xml><?xml version="1.0" encoding="utf-8"?>
+<p:notes xmlns:a="http://schemas.openxmlformats.org/drawingml/2006/main" xmlns:r="http://schemas.openxmlformats.org/officeDocument/2006/relationships" xmlns:p="http://schemas.openxmlformats.org/presentationml/2006/main">
+  <p:cSld>
+    <p:spTree>
+      <p:nvGrpSpPr>
+        <p:cNvPr id="1" name=""/>
+        <p:cNvGrpSpPr/>
+        <p:nvPr/>
+      </p:nvGrpSpPr>
+      <p:grpSpPr>
+        <a:xfrm>
+          <a:off x="0" y="0"/>
+          <a:ext cx="0" cy="0"/>
+          <a:chOff x="0" y="0"/>
+          <a:chExt cx="0" cy="0"/>
+        </a:xfrm>
+      </p:grpSpPr>
+      <p:sp>
+        <p:nvSpPr>
+          <p:cNvPr id="2" name="Slide Image Placeholder 1"/>
+          <p:cNvSpPr>
+            <a:spLocks noGrp="1" noRot="1" noChangeAspect="1"/>
+          </p:cNvSpPr>
+          <p:nvPr>
+            <p:ph type="sldImg"/>
+          </p:nvPr>
+        </p:nvSpPr>
+        <p:spPr/>
+      </p:sp>
+      <p:sp>
+        <p:nvSpPr>
+          <p:cNvPr id="3" name="Notes Placeholder 2"/>
+          <p:cNvSpPr>
+            <a:spLocks noGrp="1"/>
+          </p:cNvSpPr>
+          <p:nvPr>
+            <p:ph type="body" idx="1"/>
+          </p:nvPr>
+        </p:nvSpPr>
+        <p:spPr/>
+        <p:txBody>
+          <a:bodyPr/>
+          <a:lstStyle/>
+          <a:p>
+            <a:r>
+              <a:rPr lang="en-US" dirty="0"/>
+              <a:t>I record this information in the official logbook of the class after the lesson.</a:t>
+            </a:r>
+            <a:endParaRPr lang="en-US" dirty="0"/>
+          </a:p>
+        </p:txBody>
+      </p:sp>
+      <p:sp>
+        <p:nvSpPr>
+          <p:cNvPr id="4" name="Slide Number Placeholder 3"/>
+          <p:cNvSpPr>
+            <a:spLocks noGrp="1"/>
+          </p:cNvSpPr>
+          <p:nvPr>
+            <p:ph type="sldNum" sz="quarter" idx="10"/>
+          </p:nvPr>
+        </p:nvSpPr>
+        <p:spPr/>
+        <p:txBody>
+          <a:bodyPr/>
+          <a:lstStyle/>
+          <a:p>
+            <a:fld id="{F7021451-1387-4CA6-816F-3879F97B5CBC}" type="slidenum">
+              <a:rPr lang="en-US"/>
+              <a:t>54</a:t>
+            </a:fld>
+            <a:endParaRPr lang="en-US"/>
+          </a:p>
+        </p:txBody>
+      </p:sp>
+    </p:spTree>
+    <p:extLst>
+      <p:ext uri="{BB962C8B-B14F-4D97-AF65-F5344CB8AC3E}">
+        <p14:creationId xmlns:p14="http://schemas.microsoft.com/office/powerpoint/2010/main" val="1024086991"/>
+      </p:ext>
+    </p:extLst>
+  </p:cSld>
+  <p:clrMapOvr>
+    <a:masterClrMapping/>
+  </p:clrMapOvr>
+</p:notes>
+</file>
+
+<file path=ppt/notesSlides/notesSlide55.xml><?xml version="1.0" encoding="utf-8"?>
+<p:notes xmlns:a="http://schemas.openxmlformats.org/drawingml/2006/main" xmlns:r="http://schemas.openxmlformats.org/officeDocument/2006/relationships" xmlns:p="http://schemas.openxmlformats.org/presentationml/2006/main">
+  <p:cSld>
+    <p:spTree>
+      <p:nvGrpSpPr>
+        <p:cNvPr id="1" name=""/>
+        <p:cNvGrpSpPr/>
+        <p:nvPr/>
+      </p:nvGrpSpPr>
+      <p:grpSpPr>
+        <a:xfrm>
+          <a:off x="0" y="0"/>
+          <a:ext cx="0" cy="0"/>
+          <a:chOff x="0" y="0"/>
+          <a:chExt cx="0" cy="0"/>
+        </a:xfrm>
+      </p:grpSpPr>
+      <p:sp>
+        <p:nvSpPr>
+          <p:cNvPr id="2" name="Slide Image Placeholder 1"/>
+          <p:cNvSpPr>
+            <a:spLocks noGrp="1" noRot="1" noChangeAspect="1"/>
+          </p:cNvSpPr>
+          <p:nvPr>
+            <p:ph type="sldImg"/>
+          </p:nvPr>
+        </p:nvSpPr>
+        <p:spPr/>
+      </p:sp>
+      <p:sp>
+        <p:nvSpPr>
+          <p:cNvPr id="3" name="Notes Placeholder 2"/>
+          <p:cNvSpPr>
+            <a:spLocks noGrp="1"/>
+          </p:cNvSpPr>
+          <p:nvPr>
+            <p:ph type="body" idx="1"/>
+          </p:nvPr>
+        </p:nvSpPr>
+        <p:spPr/>
+        <p:txBody>
+          <a:bodyPr/>
+          <a:lstStyle/>
+          <a:p>
+            <a:r>
+              <a:rPr lang="en-US" dirty="0"/>
+              <a:t>I complete the second page of the logbook: the matter taught, the evaluation, the homework and the attendance.</a:t>
+            </a:r>
+            <a:endParaRPr lang="en-US" dirty="0"/>
+          </a:p>
+        </p:txBody>
+      </p:sp>
+      <p:sp>
+        <p:nvSpPr>
+          <p:cNvPr id="4" name="Slide Number Placeholder 3"/>
+          <p:cNvSpPr>
+            <a:spLocks noGrp="1"/>
+          </p:cNvSpPr>
+          <p:nvPr>
+            <p:ph type="sldNum" sz="quarter" idx="10"/>
+          </p:nvPr>
+        </p:nvSpPr>
+        <p:spPr/>
+        <p:txBody>
+          <a:bodyPr/>
+          <a:lstStyle/>
+          <a:p>
+            <a:fld id="{F7021451-1387-4CA6-816F-3879F97B5CBC}" type="slidenum">
+              <a:rPr lang="en-US"/>
+              <a:t>55</a:t>
+            </a:fld>
+            <a:endParaRPr lang="en-US"/>
+          </a:p>
+        </p:txBody>
+      </p:sp>
+    </p:spTree>
+    <p:extLst>
+      <p:ext uri="{BB962C8B-B14F-4D97-AF65-F5344CB8AC3E}">
+        <p14:creationId xmlns:p14="http://schemas.microsoft.com/office/powerpoint/2010/main" val="1024086991"/>
+      </p:ext>
+    </p:extLst>
+  </p:cSld>
+  <p:clrMapOvr>
+    <a:masterClrMapping/>
+  </p:clrMapOvr>
+</p:notes>
+</file>
+
+<file path=ppt/notesSlides/notesSlide56.xml><?xml version="1.0" encoding="utf-8"?>
+<p:notes xmlns:a="http://schemas.openxmlformats.org/drawingml/2006/main" xmlns:r="http://schemas.openxmlformats.org/officeDocument/2006/relationships" xmlns:p="http://schemas.openxmlformats.org/presentationml/2006/main">
+  <p:cSld>
+    <p:spTree>
+      <p:nvGrpSpPr>
+        <p:cNvPr id="1" name=""/>
+        <p:cNvGrpSpPr/>
+        <p:nvPr/>
+      </p:nvGrpSpPr>
+      <p:grpSpPr>
+        <a:xfrm>
+          <a:off x="0" y="0"/>
+          <a:ext cx="0" cy="0"/>
+          <a:chOff x="0" y="0"/>
+          <a:chExt cx="0" cy="0"/>
+        </a:xfrm>
+      </p:grpSpPr>
+      <p:sp>
+        <p:nvSpPr>
+          <p:cNvPr id="2" name="Slide Image Placeholder 1"/>
+          <p:cNvSpPr>
+            <a:spLocks noGrp="1" noRot="1" noChangeAspect="1"/>
+          </p:cNvSpPr>
+          <p:nvPr>
+            <p:ph type="sldImg"/>
+          </p:nvPr>
+        </p:nvSpPr>
+        <p:spPr/>
+      </p:sp>
+      <p:sp>
+        <p:nvSpPr>
+          <p:cNvPr id="3" name="Notes Placeholder 2"/>
+          <p:cNvSpPr>
+            <a:spLocks noGrp="1"/>
+          </p:cNvSpPr>
+          <p:nvPr>
+            <p:ph type="body" idx="1"/>
+          </p:nvPr>
+        </p:nvSpPr>
+        <p:spPr/>
+        <p:txBody>
+          <a:bodyPr/>
+          <a:lstStyle/>
+          <a:p>
+            <a:r>
+              <a:rPr lang="en-US" dirty="0"/>
+              <a:t>This slide is for me, the teacher: it gives the timing of the lesson and what to do if the projector is not available.</a:t>
+            </a:r>
+            <a:endParaRPr lang="en-US" dirty="0"/>
+          </a:p>
+        </p:txBody>
+      </p:sp>
+      <p:sp>
+        <p:nvSpPr>
+          <p:cNvPr id="4" name="Slide Number Placeholder 3"/>
+          <p:cNvSpPr>
+            <a:spLocks noGrp="1"/>
+          </p:cNvSpPr>
+          <p:nvPr>
+            <p:ph type="sldNum" sz="quarter" idx="10"/>
+          </p:nvPr>
+        </p:nvSpPr>
+        <p:spPr/>
+        <p:txBody>
+          <a:bodyPr/>
+          <a:lstStyle/>
+          <a:p>
+            <a:fld id="{F7021451-1387-4CA6-816F-3879F97B5CBC}" type="slidenum">
+              <a:rPr lang="en-US"/>
+              <a:t>56</a:t>
+            </a:fld>
+            <a:endParaRPr lang="en-US"/>
+          </a:p>
+        </p:txBody>
+      </p:sp>
+    </p:spTree>
+    <p:extLst>
+      <p:ext uri="{BB962C8B-B14F-4D97-AF65-F5344CB8AC3E}">
+        <p14:creationId xmlns:p14="http://schemas.microsoft.com/office/powerpoint/2010/main" val="1024086991"/>
+      </p:ext>
+    </p:extLst>
+  </p:cSld>
+  <p:clrMapOvr>
+    <a:masterClrMapping/>
+  </p:clrMapOvr>
+</p:notes>
+</file>
+
+<file path=ppt/notesSlides/notesSlide57.xml><?xml version="1.0" encoding="utf-8"?>
+<p:notes xmlns:a="http://schemas.openxmlformats.org/drawingml/2006/main" xmlns:r="http://schemas.openxmlformats.org/officeDocument/2006/relationships" xmlns:p="http://schemas.openxmlformats.org/presentationml/2006/main">
+  <p:cSld>
+    <p:spTree>
+      <p:nvGrpSpPr>
+        <p:cNvPr id="1" name=""/>
+        <p:cNvGrpSpPr/>
+        <p:nvPr/>
+      </p:nvGrpSpPr>
+      <p:grpSpPr>
+        <a:xfrm>
+          <a:off x="0" y="0"/>
+          <a:ext cx="0" cy="0"/>
+          <a:chOff x="0" y="0"/>
+          <a:chExt cx="0" cy="0"/>
+        </a:xfrm>
+      </p:grpSpPr>
+      <p:sp>
+        <p:nvSpPr>
+          <p:cNvPr id="2" name="Slide Image Placeholder 1"/>
+          <p:cNvSpPr>
+            <a:spLocks noGrp="1" noRot="1" noChangeAspect="1"/>
+          </p:cNvSpPr>
+          <p:nvPr>
+            <p:ph type="sldImg"/>
+          </p:nvPr>
+        </p:nvSpPr>
+        <p:spPr/>
+      </p:sp>
+      <p:sp>
+        <p:nvSpPr>
+          <p:cNvPr id="3" name="Notes Placeholder 2"/>
+          <p:cNvSpPr>
+            <a:spLocks noGrp="1"/>
+          </p:cNvSpPr>
+          <p:nvPr>
+            <p:ph type="body" idx="1"/>
+          </p:nvPr>
+        </p:nvSpPr>
+        <p:spPr/>
+        <p:txBody>
+          <a:bodyPr/>
+          <a:lstStyle/>
+          <a:p>
+            <a:r>
+              <a:rPr lang="en-US" dirty="0"/>
+              <a:t>These are the references and picture credits used to prepare this lesson.</a:t>
+            </a:r>
+            <a:endParaRPr lang="en-US" dirty="0"/>
+          </a:p>
+        </p:txBody>
+      </p:sp>
+      <p:sp>
+        <p:nvSpPr>
+          <p:cNvPr id="4" name="Slide Number Placeholder 3"/>
+          <p:cNvSpPr>
+            <a:spLocks noGrp="1"/>
+          </p:cNvSpPr>
+          <p:nvPr>
+            <p:ph type="sldNum" sz="quarter" idx="10"/>
+          </p:nvPr>
+        </p:nvSpPr>
+        <p:spPr/>
+        <p:txBody>
+          <a:bodyPr/>
+          <a:lstStyle/>
+          <a:p>
+            <a:fld id="{F7021451-1387-4CA6-816F-3879F97B5CBC}" type="slidenum">
+              <a:rPr lang="en-US"/>
+              <a:t>57</a:t>
             </a:fld>
             <a:endParaRPr lang="en-US"/>
           </a:p>
@@ -13896,7 +14430,7 @@
         <p:spPr>
           <a:xfrm>
             <a:off x="0" y="658368"/>
-            <a:ext cx="2468880" cy="5833872"/>
+            <a:ext cx="5120640" cy="5833872"/>
           </a:xfrm>
           <a:prstGeom prst="rect">
             <a:avLst/>
@@ -13911,8 +14445,8 @@
         </p:nvSpPr>
         <p:spPr>
           <a:xfrm>
-            <a:off x="2697480" y="1005840"/>
-            <a:ext cx="9174175" cy="731520"/>
+            <a:off x="5349240" y="1005840"/>
+            <a:ext cx="6522415" cy="731520"/>
           </a:xfrm>
           <a:prstGeom prst="rect">
             <a:avLst/>
@@ -13952,8 +14486,47 @@
         </p:nvSpPr>
         <p:spPr>
           <a:xfrm>
-            <a:off x="2697480" y="1783080"/>
-            <a:ext cx="9174175" cy="4663440"/>
+            <a:off x="5349240" y="1737360"/>
+            <a:ext cx="6522415" cy="457200"/>
+          </a:xfrm>
+          <a:prstGeom prst="rect">
+            <a:avLst/>
+          </a:prstGeom>
+          <a:noFill/>
+          <a:ln/>
+        </p:spPr>
+        <p:txBody>
+          <a:bodyPr wrap="square" lIns="0" tIns="0" rIns="0" bIns="0" rtlCol="0" anchor="ctr"/>
+          <a:lstStyle/>
+          <a:p>
+            <a:pPr algn="l" indent="0" marL="0">
+              <a:buNone/>
+            </a:pPr>
+            <a:r>
+              <a:rPr lang="en-US" sz="3200" b="1" dirty="0">
+                <a:solidFill>
+                  <a:srgbClr val="990011"/>
+                </a:solidFill>
+                <a:latin typeface="Times New Roman" pitchFamily="34" charset="0"/>
+                <a:ea typeface="Times New Roman" pitchFamily="34" charset="-122"/>
+                <a:cs typeface="Times New Roman" pitchFamily="34" charset="-120"/>
+              </a:rPr>
+              <a:t>A) Methods of Exploitation</a:t>
+            </a:r>
+            <a:endParaRPr lang="en-US" sz="3200" dirty="0"/>
+          </a:p>
+        </p:txBody>
+      </p:sp>
+      <p:sp>
+        <p:nvSpPr>
+          <p:cNvPr id="6" name="Text 3"/>
+          <p:cNvSpPr/>
+          <p:nvPr/>
+        </p:nvSpPr>
+        <p:spPr>
+          <a:xfrm>
+            <a:off x="5349240" y="2240280"/>
+            <a:ext cx="6522415" cy="4206240"/>
           </a:xfrm>
           <a:prstGeom prst="rect">
             <a:avLst/>
@@ -13980,7 +14553,7 @@
                 <a:ea typeface="Times New Roman" pitchFamily="34" charset="-122"/>
                 <a:cs typeface="Times New Roman" pitchFamily="34" charset="-120"/>
               </a:rPr>
-              <a:t>Forests are exploited as follows:</a:t>
+              <a:t>Forests are exploited by the following methods:</a:t>
             </a:r>
             <a:endParaRPr lang="en-US" sz="4000" dirty="0"/>
           </a:p>
@@ -14000,7 +14573,7 @@
                 <a:ea typeface="Times New Roman" pitchFamily="34" charset="-122"/>
                 <a:cs typeface="Times New Roman" pitchFamily="34" charset="-120"/>
               </a:rPr>
-              <a:t>Methods: </a:t>
+              <a:t>Prospecting: </a:t>
             </a:r>
             <a:pPr algn="l" indent="0" marL="0">
               <a:spcAft>
@@ -14017,7 +14590,7 @@
                 <a:ea typeface="Times New Roman" pitchFamily="34" charset="-122"/>
                 <a:cs typeface="Times New Roman" pitchFamily="34" charset="-120"/>
               </a:rPr>
-              <a:t>Companies prospect, fell trees with chainsaws, haul and carry logs by lorry and train to sawmills and ports.</a:t>
+              <a:t>Companies look for valuable trees.</a:t>
             </a:r>
             <a:endParaRPr lang="en-US" sz="4000" dirty="0"/>
           </a:p>
@@ -14037,7 +14610,7 @@
                 <a:ea typeface="Times New Roman" pitchFamily="34" charset="-122"/>
                 <a:cs typeface="Times New Roman" pitchFamily="34" charset="-120"/>
               </a:rPr>
-              <a:t>Importance: </a:t>
+              <a:t>Felling: </a:t>
             </a:r>
             <a:pPr algn="l" indent="0" marL="0">
               <a:spcAft>
@@ -14054,7 +14627,7 @@
                 <a:ea typeface="Times New Roman" pitchFamily="34" charset="-122"/>
                 <a:cs typeface="Times New Roman" pitchFamily="34" charset="-120"/>
               </a:rPr>
-              <a:t>Forestry gives jobs, export income and timber for building and furniture.</a:t>
+              <a:t>Trees are cut down with chainsaws.</a:t>
             </a:r>
             <a:endParaRPr lang="en-US" sz="4000" dirty="0"/>
           </a:p>
@@ -14189,7 +14762,7 @@
         <p:spPr>
           <a:xfrm>
             <a:off x="0" y="658368"/>
-            <a:ext cx="1463040" cy="5833872"/>
+            <a:ext cx="5120640" cy="5833872"/>
           </a:xfrm>
           <a:prstGeom prst="rect">
             <a:avLst/>
@@ -14204,8 +14777,8 @@
         </p:nvSpPr>
         <p:spPr>
           <a:xfrm>
-            <a:off x="1691640" y="1005840"/>
-            <a:ext cx="10180015" cy="731520"/>
+            <a:off x="5349240" y="1005840"/>
+            <a:ext cx="6522415" cy="731520"/>
           </a:xfrm>
           <a:prstGeom prst="rect">
             <a:avLst/>
@@ -14231,7 +14804,7 @@
                 <a:ea typeface="Times New Roman" pitchFamily="34" charset="-122"/>
                 <a:cs typeface="Times New Roman" pitchFamily="34" charset="-120"/>
               </a:rPr>
-              <a:t>3. Problems and Conservation Efforts</a:t>
+              <a:t>2. Methods of Exploitation and Importance</a:t>
             </a:r>
             <a:endParaRPr lang="en-US" sz="3600" dirty="0"/>
           </a:p>
@@ -14245,8 +14818,47 @@
         </p:nvSpPr>
         <p:spPr>
           <a:xfrm>
-            <a:off x="1691640" y="1783080"/>
-            <a:ext cx="10180015" cy="4663440"/>
+            <a:off x="5349240" y="1737360"/>
+            <a:ext cx="6522415" cy="457200"/>
+          </a:xfrm>
+          <a:prstGeom prst="rect">
+            <a:avLst/>
+          </a:prstGeom>
+          <a:noFill/>
+          <a:ln/>
+        </p:spPr>
+        <p:txBody>
+          <a:bodyPr wrap="square" lIns="0" tIns="0" rIns="0" bIns="0" rtlCol="0" anchor="ctr"/>
+          <a:lstStyle/>
+          <a:p>
+            <a:pPr algn="l" indent="0" marL="0">
+              <a:buNone/>
+            </a:pPr>
+            <a:r>
+              <a:rPr lang="en-US" sz="2700" b="1" dirty="0">
+                <a:solidFill>
+                  <a:srgbClr val="990011"/>
+                </a:solidFill>
+                <a:latin typeface="Times New Roman" pitchFamily="34" charset="0"/>
+                <a:ea typeface="Times New Roman" pitchFamily="34" charset="-122"/>
+                <a:cs typeface="Times New Roman" pitchFamily="34" charset="-120"/>
+              </a:rPr>
+              <a:t>A) Methods of Exploitation (continued)</a:t>
+            </a:r>
+            <a:endParaRPr lang="en-US" sz="2700" dirty="0"/>
+          </a:p>
+        </p:txBody>
+      </p:sp>
+      <p:sp>
+        <p:nvSpPr>
+          <p:cNvPr id="6" name="Text 3"/>
+          <p:cNvSpPr/>
+          <p:nvPr/>
+        </p:nvSpPr>
+        <p:spPr>
+          <a:xfrm>
+            <a:off x="5349240" y="2240280"/>
+            <a:ext cx="6522415" cy="4206240"/>
           </a:xfrm>
           <a:prstGeom prst="rect">
             <a:avLst/>
@@ -14265,7 +14877,7 @@
               <a:buNone/>
             </a:pPr>
             <a:r>
-              <a:rPr lang="en-US" sz="4000" i="1" dirty="0">
+              <a:rPr lang="en-US" sz="4000" b="1" dirty="0">
                 <a:solidFill>
                   <a:srgbClr val="111111"/>
                 </a:solidFill>
@@ -14273,11 +14885,8 @@
                 <a:ea typeface="Times New Roman" pitchFamily="34" charset="-122"/>
                 <a:cs typeface="Times New Roman" pitchFamily="34" charset="-120"/>
               </a:rPr>
-              <a:t>Forestry faces problems and conservation efforts:</a:t>
-            </a:r>
-            <a:endParaRPr lang="en-US" sz="4000" dirty="0"/>
-          </a:p>
-          <a:p>
+              <a:t>Transport: </a:t>
+            </a:r>
             <a:pPr algn="l" indent="0" marL="0">
               <a:spcAft>
                 <a:spcPts val="800"/>
@@ -14285,7 +14894,7 @@
               <a:buNone/>
             </a:pPr>
             <a:r>
-              <a:rPr lang="en-US" sz="4000" b="1" dirty="0">
+              <a:rPr lang="en-US" sz="4000" dirty="0">
                 <a:solidFill>
                   <a:srgbClr val="111111"/>
                 </a:solidFill>
@@ -14293,61 +14902,7 @@
                 <a:ea typeface="Times New Roman" pitchFamily="34" charset="-122"/>
                 <a:cs typeface="Times New Roman" pitchFamily="34" charset="-120"/>
               </a:rPr>
-              <a:t>Problems: </a:t>
-            </a:r>
-            <a:pPr algn="l" indent="0" marL="0">
-              <a:spcAft>
-                <a:spcPts val="800"/>
-              </a:spcAft>
-              <a:buNone/>
-            </a:pPr>
-            <a:r>
-              <a:rPr lang="en-US" sz="4000" dirty="0">
-                <a:solidFill>
-                  <a:srgbClr val="111111"/>
-                </a:solidFill>
-                <a:latin typeface="Times New Roman" pitchFamily="34" charset="0"/>
-                <a:ea typeface="Times New Roman" pitchFamily="34" charset="-122"/>
-                <a:cs typeface="Times New Roman" pitchFamily="34" charset="-120"/>
-              </a:rPr>
-              <a:t>Illegal logging, poor roads, scattered valuable trees and deforestation.</a:t>
-            </a:r>
-            <a:endParaRPr lang="en-US" sz="4000" dirty="0"/>
-          </a:p>
-          <a:p>
-            <a:pPr algn="l" indent="0" marL="0">
-              <a:spcAft>
-                <a:spcPts val="800"/>
-              </a:spcAft>
-              <a:buNone/>
-            </a:pPr>
-            <a:r>
-              <a:rPr lang="en-US" sz="4000" b="1" dirty="0">
-                <a:solidFill>
-                  <a:srgbClr val="111111"/>
-                </a:solidFill>
-                <a:latin typeface="Times New Roman" pitchFamily="34" charset="0"/>
-                <a:ea typeface="Times New Roman" pitchFamily="34" charset="-122"/>
-                <a:cs typeface="Times New Roman" pitchFamily="34" charset="-120"/>
-              </a:rPr>
-              <a:t>Efforts: </a:t>
-            </a:r>
-            <a:pPr algn="l" indent="0" marL="0">
-              <a:spcAft>
-                <a:spcPts val="800"/>
-              </a:spcAft>
-              <a:buNone/>
-            </a:pPr>
-            <a:r>
-              <a:rPr lang="en-US" sz="4000" dirty="0">
-                <a:solidFill>
-                  <a:srgbClr val="111111"/>
-                </a:solidFill>
-                <a:latin typeface="Times New Roman" pitchFamily="34" charset="0"/>
-                <a:ea typeface="Times New Roman" pitchFamily="34" charset="-122"/>
-                <a:cs typeface="Times New Roman" pitchFamily="34" charset="-120"/>
-              </a:rPr>
-              <a:t>The 1994 Forestry Law, management plans, reforestation and protected areas such as the Dja.</a:t>
+              <a:t>Logs are carried by lorry and train to sawmills and ports.</a:t>
             </a:r>
             <a:endParaRPr lang="en-US" sz="4000" dirty="0"/>
           </a:p>
@@ -14459,7 +15014,7 @@
                 <a:ea typeface="Calibri" pitchFamily="34" charset="-122"/>
                 <a:cs typeface="Calibri" pitchFamily="34" charset="-120"/>
               </a:rPr>
-              <a:t>FORMATIVE EVALUATION</a:t>
+              <a:t>BOARD SUMMARY</a:t>
             </a:r>
             <a:endParaRPr lang="en-US" sz="1400" dirty="0"/>
           </a:p>
@@ -14524,7 +15079,7 @@
                 <a:ea typeface="Times New Roman" pitchFamily="34" charset="-122"/>
                 <a:cs typeface="Times New Roman" pitchFamily="34" charset="-120"/>
               </a:rPr>
-              <a:t>Evaluation 1</a:t>
+              <a:t>2. Methods of Exploitation and Importance</a:t>
             </a:r>
             <a:endParaRPr lang="en-US" sz="3600" dirty="0"/>
           </a:p>
@@ -14538,8 +15093,47 @@
         </p:nvSpPr>
         <p:spPr>
           <a:xfrm>
-            <a:off x="5349240" y="1783080"/>
-            <a:ext cx="6522415" cy="4663440"/>
+            <a:off x="5349240" y="1737360"/>
+            <a:ext cx="6522415" cy="457200"/>
+          </a:xfrm>
+          <a:prstGeom prst="rect">
+            <a:avLst/>
+          </a:prstGeom>
+          <a:noFill/>
+          <a:ln/>
+        </p:spPr>
+        <p:txBody>
+          <a:bodyPr wrap="square" lIns="0" tIns="0" rIns="0" bIns="0" rtlCol="0" anchor="ctr"/>
+          <a:lstStyle/>
+          <a:p>
+            <a:pPr algn="l" indent="0" marL="0">
+              <a:buNone/>
+            </a:pPr>
+            <a:r>
+              <a:rPr lang="en-US" sz="3200" b="1" dirty="0">
+                <a:solidFill>
+                  <a:srgbClr val="990011"/>
+                </a:solidFill>
+                <a:latin typeface="Times New Roman" pitchFamily="34" charset="0"/>
+                <a:ea typeface="Times New Roman" pitchFamily="34" charset="-122"/>
+                <a:cs typeface="Times New Roman" pitchFamily="34" charset="-120"/>
+              </a:rPr>
+              <a:t>B) Importance</a:t>
+            </a:r>
+            <a:endParaRPr lang="en-US" sz="3200" dirty="0"/>
+          </a:p>
+        </p:txBody>
+      </p:sp>
+      <p:sp>
+        <p:nvSpPr>
+          <p:cNvPr id="6" name="Text 3"/>
+          <p:cNvSpPr/>
+          <p:nvPr/>
+        </p:nvSpPr>
+        <p:spPr>
+          <a:xfrm>
+            <a:off x="5349240" y="2240280"/>
+            <a:ext cx="6522415" cy="4206240"/>
           </a:xfrm>
           <a:prstGeom prst="rect">
             <a:avLst/>
@@ -14558,7 +15152,7 @@
               <a:buNone/>
             </a:pPr>
             <a:r>
-              <a:rPr lang="en-US" sz="4000" dirty="0">
+              <a:rPr lang="en-US" sz="4000" i="1" dirty="0">
                 <a:solidFill>
                   <a:srgbClr val="111111"/>
                 </a:solidFill>
@@ -14566,7 +15160,81 @@
                 <a:ea typeface="Times New Roman" pitchFamily="34" charset="-122"/>
                 <a:cs typeface="Times New Roman" pitchFamily="34" charset="-120"/>
               </a:rPr>
-              <a:t>Where are the main forests of Cameroon?</a:t>
+              <a:t>Forestry is important for the following reasons:</a:t>
+            </a:r>
+            <a:endParaRPr lang="en-US" sz="4000" dirty="0"/>
+          </a:p>
+          <a:p>
+            <a:pPr algn="l" indent="0" marL="0">
+              <a:spcAft>
+                <a:spcPts val="800"/>
+              </a:spcAft>
+              <a:buNone/>
+            </a:pPr>
+            <a:r>
+              <a:rPr lang="en-US" sz="4000" b="1" dirty="0">
+                <a:solidFill>
+                  <a:srgbClr val="111111"/>
+                </a:solidFill>
+                <a:latin typeface="Times New Roman" pitchFamily="34" charset="0"/>
+                <a:ea typeface="Times New Roman" pitchFamily="34" charset="-122"/>
+                <a:cs typeface="Times New Roman" pitchFamily="34" charset="-120"/>
+              </a:rPr>
+              <a:t>Jobs: </a:t>
+            </a:r>
+            <a:pPr algn="l" indent="0" marL="0">
+              <a:spcAft>
+                <a:spcPts val="800"/>
+              </a:spcAft>
+              <a:buNone/>
+            </a:pPr>
+            <a:r>
+              <a:rPr lang="en-US" sz="4000" dirty="0">
+                <a:solidFill>
+                  <a:srgbClr val="111111"/>
+                </a:solidFill>
+                <a:latin typeface="Times New Roman" pitchFamily="34" charset="0"/>
+                <a:ea typeface="Times New Roman" pitchFamily="34" charset="-122"/>
+                <a:cs typeface="Times New Roman" pitchFamily="34" charset="-120"/>
+              </a:rPr>
+              <a:t>Many people work in logging and sawmills.</a:t>
+            </a:r>
+            <a:endParaRPr lang="en-US" sz="4000" dirty="0"/>
+          </a:p>
+          <a:p>
+            <a:pPr algn="l" indent="0" marL="0">
+              <a:spcAft>
+                <a:spcPts val="800"/>
+              </a:spcAft>
+              <a:buNone/>
+            </a:pPr>
+            <a:r>
+              <a:rPr lang="en-US" sz="4000" b="1" dirty="0">
+                <a:solidFill>
+                  <a:srgbClr val="111111"/>
+                </a:solidFill>
+                <a:latin typeface="Times New Roman" pitchFamily="34" charset="0"/>
+                <a:ea typeface="Times New Roman" pitchFamily="34" charset="-122"/>
+                <a:cs typeface="Times New Roman" pitchFamily="34" charset="-120"/>
+              </a:rPr>
+              <a:t>Export income: </a:t>
+            </a:r>
+            <a:pPr algn="l" indent="0" marL="0">
+              <a:spcAft>
+                <a:spcPts val="800"/>
+              </a:spcAft>
+              <a:buNone/>
+            </a:pPr>
+            <a:r>
+              <a:rPr lang="en-US" sz="4000" dirty="0">
+                <a:solidFill>
+                  <a:srgbClr val="111111"/>
+                </a:solidFill>
+                <a:latin typeface="Times New Roman" pitchFamily="34" charset="0"/>
+                <a:ea typeface="Times New Roman" pitchFamily="34" charset="-122"/>
+                <a:cs typeface="Times New Roman" pitchFamily="34" charset="-120"/>
+              </a:rPr>
+              <a:t>Timber is sold abroad.</a:t>
             </a:r>
             <a:endParaRPr lang="en-US" sz="4000" dirty="0"/>
           </a:p>
@@ -14917,7 +15585,7 @@
                 <a:ea typeface="Calibri" pitchFamily="34" charset="-122"/>
                 <a:cs typeface="Calibri" pitchFamily="34" charset="-120"/>
               </a:rPr>
-              <a:t>FORMATIVE EVALUATION</a:t>
+              <a:t>BOARD SUMMARY</a:t>
             </a:r>
             <a:endParaRPr lang="en-US" sz="1400" dirty="0"/>
           </a:p>
@@ -14982,7 +15650,7 @@
                 <a:ea typeface="Times New Roman" pitchFamily="34" charset="-122"/>
                 <a:cs typeface="Times New Roman" pitchFamily="34" charset="-120"/>
               </a:rPr>
-              <a:t>Expected Answer</a:t>
+              <a:t>2. Methods of Exploitation and Importance</a:t>
             </a:r>
             <a:endParaRPr lang="en-US" sz="3600" dirty="0"/>
           </a:p>
@@ -14996,8 +15664,47 @@
         </p:nvSpPr>
         <p:spPr>
           <a:xfrm>
-            <a:off x="5349240" y="1783080"/>
-            <a:ext cx="6522415" cy="4663440"/>
+            <a:off x="5349240" y="1737360"/>
+            <a:ext cx="6522415" cy="457200"/>
+          </a:xfrm>
+          <a:prstGeom prst="rect">
+            <a:avLst/>
+          </a:prstGeom>
+          <a:noFill/>
+          <a:ln/>
+        </p:spPr>
+        <p:txBody>
+          <a:bodyPr wrap="square" lIns="0" tIns="0" rIns="0" bIns="0" rtlCol="0" anchor="ctr"/>
+          <a:lstStyle/>
+          <a:p>
+            <a:pPr algn="l" indent="0" marL="0">
+              <a:buNone/>
+            </a:pPr>
+            <a:r>
+              <a:rPr lang="en-US" sz="3200" b="1" dirty="0">
+                <a:solidFill>
+                  <a:srgbClr val="990011"/>
+                </a:solidFill>
+                <a:latin typeface="Times New Roman" pitchFamily="34" charset="0"/>
+                <a:ea typeface="Times New Roman" pitchFamily="34" charset="-122"/>
+                <a:cs typeface="Times New Roman" pitchFamily="34" charset="-120"/>
+              </a:rPr>
+              <a:t>B) Importance (continued)</a:t>
+            </a:r>
+            <a:endParaRPr lang="en-US" sz="3200" dirty="0"/>
+          </a:p>
+        </p:txBody>
+      </p:sp>
+      <p:sp>
+        <p:nvSpPr>
+          <p:cNvPr id="6" name="Text 3"/>
+          <p:cNvSpPr/>
+          <p:nvPr/>
+        </p:nvSpPr>
+        <p:spPr>
+          <a:xfrm>
+            <a:off x="5349240" y="2240280"/>
+            <a:ext cx="6522415" cy="4206240"/>
           </a:xfrm>
           <a:prstGeom prst="rect">
             <a:avLst/>
@@ -15016,7 +15723,7 @@
               <a:buNone/>
             </a:pPr>
             <a:r>
-              <a:rPr lang="en-US" sz="4000" dirty="0">
+              <a:rPr lang="en-US" sz="4000" b="1" dirty="0">
                 <a:solidFill>
                   <a:srgbClr val="111111"/>
                 </a:solidFill>
@@ -15024,7 +15731,24 @@
                 <a:ea typeface="Times New Roman" pitchFamily="34" charset="-122"/>
                 <a:cs typeface="Times New Roman" pitchFamily="34" charset="-120"/>
               </a:rPr>
-              <a:t>In the South, East and Centre.</a:t>
+              <a:t>Building materials: </a:t>
+            </a:r>
+            <a:pPr algn="l" indent="0" marL="0">
+              <a:spcAft>
+                <a:spcPts val="800"/>
+              </a:spcAft>
+              <a:buNone/>
+            </a:pPr>
+            <a:r>
+              <a:rPr lang="en-US" sz="4000" dirty="0">
+                <a:solidFill>
+                  <a:srgbClr val="111111"/>
+                </a:solidFill>
+                <a:latin typeface="Times New Roman" pitchFamily="34" charset="0"/>
+                <a:ea typeface="Times New Roman" pitchFamily="34" charset="-122"/>
+                <a:cs typeface="Times New Roman" pitchFamily="34" charset="-120"/>
+              </a:rPr>
+              <a:t>Timber is used for houses and furniture.</a:t>
             </a:r>
             <a:endParaRPr lang="en-US" sz="4000" dirty="0"/>
           </a:p>
@@ -15136,7 +15860,7 @@
                 <a:ea typeface="Calibri" pitchFamily="34" charset="-122"/>
                 <a:cs typeface="Calibri" pitchFamily="34" charset="-120"/>
               </a:rPr>
-              <a:t>FORMATIVE EVALUATION</a:t>
+              <a:t>BOARD SUMMARY</a:t>
             </a:r>
             <a:endParaRPr lang="en-US" sz="1400" dirty="0"/>
           </a:p>
@@ -15201,7 +15925,7 @@
                 <a:ea typeface="Times New Roman" pitchFamily="34" charset="-122"/>
                 <a:cs typeface="Times New Roman" pitchFamily="34" charset="-120"/>
               </a:rPr>
-              <a:t>Evaluation 2</a:t>
+              <a:t>3. Problems and Conservation Efforts</a:t>
             </a:r>
             <a:endParaRPr lang="en-US" sz="3600" dirty="0"/>
           </a:p>
@@ -15215,8 +15939,47 @@
         </p:nvSpPr>
         <p:spPr>
           <a:xfrm>
-            <a:off x="5349240" y="1783080"/>
-            <a:ext cx="6522415" cy="4663440"/>
+            <a:off x="5349240" y="1737360"/>
+            <a:ext cx="6522415" cy="457200"/>
+          </a:xfrm>
+          <a:prstGeom prst="rect">
+            <a:avLst/>
+          </a:prstGeom>
+          <a:noFill/>
+          <a:ln/>
+        </p:spPr>
+        <p:txBody>
+          <a:bodyPr wrap="square" lIns="0" tIns="0" rIns="0" bIns="0" rtlCol="0" anchor="ctr"/>
+          <a:lstStyle/>
+          <a:p>
+            <a:pPr algn="l" indent="0" marL="0">
+              <a:buNone/>
+            </a:pPr>
+            <a:r>
+              <a:rPr lang="en-US" sz="3200" b="1" dirty="0">
+                <a:solidFill>
+                  <a:srgbClr val="990011"/>
+                </a:solidFill>
+                <a:latin typeface="Times New Roman" pitchFamily="34" charset="0"/>
+                <a:ea typeface="Times New Roman" pitchFamily="34" charset="-122"/>
+                <a:cs typeface="Times New Roman" pitchFamily="34" charset="-120"/>
+              </a:rPr>
+              <a:t>A) Problems</a:t>
+            </a:r>
+            <a:endParaRPr lang="en-US" sz="3200" dirty="0"/>
+          </a:p>
+        </p:txBody>
+      </p:sp>
+      <p:sp>
+        <p:nvSpPr>
+          <p:cNvPr id="6" name="Text 3"/>
+          <p:cNvSpPr/>
+          <p:nvPr/>
+        </p:nvSpPr>
+        <p:spPr>
+          <a:xfrm>
+            <a:off x="5349240" y="2240280"/>
+            <a:ext cx="6522415" cy="4206240"/>
           </a:xfrm>
           <a:prstGeom prst="rect">
             <a:avLst/>
@@ -15235,7 +15998,7 @@
               <a:buNone/>
             </a:pPr>
             <a:r>
-              <a:rPr lang="en-US" sz="4000" dirty="0">
+              <a:rPr lang="en-US" sz="4000" i="1" dirty="0">
                 <a:solidFill>
                   <a:srgbClr val="111111"/>
                 </a:solidFill>
@@ -15243,7 +16006,81 @@
                 <a:ea typeface="Times New Roman" pitchFamily="34" charset="-122"/>
                 <a:cs typeface="Times New Roman" pitchFamily="34" charset="-120"/>
               </a:rPr>
-              <a:t>Give two conservation efforts.</a:t>
+              <a:t>Forest exploitation faces the following problems:</a:t>
+            </a:r>
+            <a:endParaRPr lang="en-US" sz="4000" dirty="0"/>
+          </a:p>
+          <a:p>
+            <a:pPr algn="l" indent="0" marL="0">
+              <a:spcAft>
+                <a:spcPts val="800"/>
+              </a:spcAft>
+              <a:buNone/>
+            </a:pPr>
+            <a:r>
+              <a:rPr lang="en-US" sz="4000" b="1" dirty="0">
+                <a:solidFill>
+                  <a:srgbClr val="111111"/>
+                </a:solidFill>
+                <a:latin typeface="Times New Roman" pitchFamily="34" charset="0"/>
+                <a:ea typeface="Times New Roman" pitchFamily="34" charset="-122"/>
+                <a:cs typeface="Times New Roman" pitchFamily="34" charset="-120"/>
+              </a:rPr>
+              <a:t>Illegal logging: </a:t>
+            </a:r>
+            <a:pPr algn="l" indent="0" marL="0">
+              <a:spcAft>
+                <a:spcPts val="800"/>
+              </a:spcAft>
+              <a:buNone/>
+            </a:pPr>
+            <a:r>
+              <a:rPr lang="en-US" sz="4000" dirty="0">
+                <a:solidFill>
+                  <a:srgbClr val="111111"/>
+                </a:solidFill>
+                <a:latin typeface="Times New Roman" pitchFamily="34" charset="0"/>
+                <a:ea typeface="Times New Roman" pitchFamily="34" charset="-122"/>
+                <a:cs typeface="Times New Roman" pitchFamily="34" charset="-120"/>
+              </a:rPr>
+              <a:t>Trees are cut without permission.</a:t>
+            </a:r>
+            <a:endParaRPr lang="en-US" sz="4000" dirty="0"/>
+          </a:p>
+          <a:p>
+            <a:pPr algn="l" indent="0" marL="0">
+              <a:spcAft>
+                <a:spcPts val="800"/>
+              </a:spcAft>
+              <a:buNone/>
+            </a:pPr>
+            <a:r>
+              <a:rPr lang="en-US" sz="4000" b="1" dirty="0">
+                <a:solidFill>
+                  <a:srgbClr val="111111"/>
+                </a:solidFill>
+                <a:latin typeface="Times New Roman" pitchFamily="34" charset="0"/>
+                <a:ea typeface="Times New Roman" pitchFamily="34" charset="-122"/>
+                <a:cs typeface="Times New Roman" pitchFamily="34" charset="-120"/>
+              </a:rPr>
+              <a:t>Poor roads: </a:t>
+            </a:r>
+            <a:pPr algn="l" indent="0" marL="0">
+              <a:spcAft>
+                <a:spcPts val="800"/>
+              </a:spcAft>
+              <a:buNone/>
+            </a:pPr>
+            <a:r>
+              <a:rPr lang="en-US" sz="4000" dirty="0">
+                <a:solidFill>
+                  <a:srgbClr val="111111"/>
+                </a:solidFill>
+                <a:latin typeface="Times New Roman" pitchFamily="34" charset="0"/>
+                <a:ea typeface="Times New Roman" pitchFamily="34" charset="-122"/>
+                <a:cs typeface="Times New Roman" pitchFamily="34" charset="-120"/>
+              </a:rPr>
+              <a:t>Many forests are hard to reach.</a:t>
             </a:r>
             <a:endParaRPr lang="en-US" sz="4000" dirty="0"/>
           </a:p>
@@ -15355,7 +16192,7 @@
                 <a:ea typeface="Calibri" pitchFamily="34" charset="-122"/>
                 <a:cs typeface="Calibri" pitchFamily="34" charset="-120"/>
               </a:rPr>
-              <a:t>FORMATIVE EVALUATION</a:t>
+              <a:t>BOARD SUMMARY</a:t>
             </a:r>
             <a:endParaRPr lang="en-US" sz="1400" dirty="0"/>
           </a:p>
@@ -15420,7 +16257,7 @@
                 <a:ea typeface="Times New Roman" pitchFamily="34" charset="-122"/>
                 <a:cs typeface="Times New Roman" pitchFamily="34" charset="-120"/>
               </a:rPr>
-              <a:t>Expected Answer</a:t>
+              <a:t>3. Problems and Conservation Efforts</a:t>
             </a:r>
             <a:endParaRPr lang="en-US" sz="3600" dirty="0"/>
           </a:p>
@@ -15434,8 +16271,47 @@
         </p:nvSpPr>
         <p:spPr>
           <a:xfrm>
-            <a:off x="5349240" y="1783080"/>
-            <a:ext cx="6522415" cy="4663440"/>
+            <a:off x="5349240" y="1737360"/>
+            <a:ext cx="6522415" cy="457200"/>
+          </a:xfrm>
+          <a:prstGeom prst="rect">
+            <a:avLst/>
+          </a:prstGeom>
+          <a:noFill/>
+          <a:ln/>
+        </p:spPr>
+        <p:txBody>
+          <a:bodyPr wrap="square" lIns="0" tIns="0" rIns="0" bIns="0" rtlCol="0" anchor="ctr"/>
+          <a:lstStyle/>
+          <a:p>
+            <a:pPr algn="l" indent="0" marL="0">
+              <a:buNone/>
+            </a:pPr>
+            <a:r>
+              <a:rPr lang="en-US" sz="3200" b="1" dirty="0">
+                <a:solidFill>
+                  <a:srgbClr val="990011"/>
+                </a:solidFill>
+                <a:latin typeface="Times New Roman" pitchFamily="34" charset="0"/>
+                <a:ea typeface="Times New Roman" pitchFamily="34" charset="-122"/>
+                <a:cs typeface="Times New Roman" pitchFamily="34" charset="-120"/>
+              </a:rPr>
+              <a:t>A) Problems (continued)</a:t>
+            </a:r>
+            <a:endParaRPr lang="en-US" sz="3200" dirty="0"/>
+          </a:p>
+        </p:txBody>
+      </p:sp>
+      <p:sp>
+        <p:nvSpPr>
+          <p:cNvPr id="6" name="Text 3"/>
+          <p:cNvSpPr/>
+          <p:nvPr/>
+        </p:nvSpPr>
+        <p:spPr>
+          <a:xfrm>
+            <a:off x="5349240" y="2240280"/>
+            <a:ext cx="6522415" cy="4206240"/>
           </a:xfrm>
           <a:prstGeom prst="rect">
             <a:avLst/>
@@ -15454,7 +16330,7 @@
               <a:buNone/>
             </a:pPr>
             <a:r>
-              <a:rPr lang="en-US" sz="4000" dirty="0">
+              <a:rPr lang="en-US" sz="4000" b="1" dirty="0">
                 <a:solidFill>
                   <a:srgbClr val="111111"/>
                 </a:solidFill>
@@ -15462,7 +16338,61 @@
                 <a:ea typeface="Times New Roman" pitchFamily="34" charset="-122"/>
                 <a:cs typeface="Times New Roman" pitchFamily="34" charset="-120"/>
               </a:rPr>
-              <a:t>The Forestry Law and protected areas.</a:t>
+              <a:t>Scattered valuable trees: </a:t>
+            </a:r>
+            <a:pPr algn="l" indent="0" marL="0">
+              <a:spcAft>
+                <a:spcPts val="800"/>
+              </a:spcAft>
+              <a:buNone/>
+            </a:pPr>
+            <a:r>
+              <a:rPr lang="en-US" sz="4000" dirty="0">
+                <a:solidFill>
+                  <a:srgbClr val="111111"/>
+                </a:solidFill>
+                <a:latin typeface="Times New Roman" pitchFamily="34" charset="0"/>
+                <a:ea typeface="Times New Roman" pitchFamily="34" charset="-122"/>
+                <a:cs typeface="Times New Roman" pitchFamily="34" charset="-120"/>
+              </a:rPr>
+              <a:t>Good trees are far apart.</a:t>
+            </a:r>
+            <a:endParaRPr lang="en-US" sz="4000" dirty="0"/>
+          </a:p>
+          <a:p>
+            <a:pPr algn="l" indent="0" marL="0">
+              <a:spcAft>
+                <a:spcPts val="800"/>
+              </a:spcAft>
+              <a:buNone/>
+            </a:pPr>
+            <a:r>
+              <a:rPr lang="en-US" sz="4000" b="1" dirty="0">
+                <a:solidFill>
+                  <a:srgbClr val="111111"/>
+                </a:solidFill>
+                <a:latin typeface="Times New Roman" pitchFamily="34" charset="0"/>
+                <a:ea typeface="Times New Roman" pitchFamily="34" charset="-122"/>
+                <a:cs typeface="Times New Roman" pitchFamily="34" charset="-120"/>
+              </a:rPr>
+              <a:t>Deforestation: </a:t>
+            </a:r>
+            <a:pPr algn="l" indent="0" marL="0">
+              <a:spcAft>
+                <a:spcPts val="800"/>
+              </a:spcAft>
+              <a:buNone/>
+            </a:pPr>
+            <a:r>
+              <a:rPr lang="en-US" sz="4000" dirty="0">
+                <a:solidFill>
+                  <a:srgbClr val="111111"/>
+                </a:solidFill>
+                <a:latin typeface="Times New Roman" pitchFamily="34" charset="0"/>
+                <a:ea typeface="Times New Roman" pitchFamily="34" charset="-122"/>
+                <a:cs typeface="Times New Roman" pitchFamily="34" charset="-120"/>
+              </a:rPr>
+              <a:t>Forests are disappearing.</a:t>
             </a:r>
             <a:endParaRPr lang="en-US" sz="4000" dirty="0"/>
           </a:p>
@@ -15574,7 +16504,7 @@
                 <a:ea typeface="Calibri" pitchFamily="34" charset="-122"/>
                 <a:cs typeface="Calibri" pitchFamily="34" charset="-120"/>
               </a:rPr>
-              <a:t>REMEDIATION</a:t>
+              <a:t>BOARD SUMMARY</a:t>
             </a:r>
             <a:endParaRPr lang="en-US" sz="1400" dirty="0"/>
           </a:p>
@@ -15639,7 +16569,7 @@
                 <a:ea typeface="Times New Roman" pitchFamily="34" charset="-122"/>
                 <a:cs typeface="Times New Roman" pitchFamily="34" charset="-120"/>
               </a:rPr>
-              <a:t>Remediation</a:t>
+              <a:t>3. Problems and Conservation Efforts</a:t>
             </a:r>
             <a:endParaRPr lang="en-US" sz="3600" dirty="0"/>
           </a:p>
@@ -15653,8 +16583,47 @@
         </p:nvSpPr>
         <p:spPr>
           <a:xfrm>
-            <a:off x="5349240" y="1783080"/>
-            <a:ext cx="6522415" cy="4663440"/>
+            <a:off x="5349240" y="1737360"/>
+            <a:ext cx="6522415" cy="457200"/>
+          </a:xfrm>
+          <a:prstGeom prst="rect">
+            <a:avLst/>
+          </a:prstGeom>
+          <a:noFill/>
+          <a:ln/>
+        </p:spPr>
+        <p:txBody>
+          <a:bodyPr wrap="square" lIns="0" tIns="0" rIns="0" bIns="0" rtlCol="0" anchor="ctr"/>
+          <a:lstStyle/>
+          <a:p>
+            <a:pPr algn="l" indent="0" marL="0">
+              <a:buNone/>
+            </a:pPr>
+            <a:r>
+              <a:rPr lang="en-US" sz="3200" b="1" dirty="0">
+                <a:solidFill>
+                  <a:srgbClr val="990011"/>
+                </a:solidFill>
+                <a:latin typeface="Times New Roman" pitchFamily="34" charset="0"/>
+                <a:ea typeface="Times New Roman" pitchFamily="34" charset="-122"/>
+                <a:cs typeface="Times New Roman" pitchFamily="34" charset="-120"/>
+              </a:rPr>
+              <a:t>B) Conservation Efforts</a:t>
+            </a:r>
+            <a:endParaRPr lang="en-US" sz="3200" dirty="0"/>
+          </a:p>
+        </p:txBody>
+      </p:sp>
+      <p:sp>
+        <p:nvSpPr>
+          <p:cNvPr id="6" name="Text 3"/>
+          <p:cNvSpPr/>
+          <p:nvPr/>
+        </p:nvSpPr>
+        <p:spPr>
+          <a:xfrm>
+            <a:off x="5349240" y="2240280"/>
+            <a:ext cx="6522415" cy="4206240"/>
           </a:xfrm>
           <a:prstGeom prst="rect">
             <a:avLst/>
@@ -15673,7 +16642,7 @@
               <a:buNone/>
             </a:pPr>
             <a:r>
-              <a:rPr lang="en-US" sz="4000" b="1" dirty="0">
+              <a:rPr lang="en-US" sz="4000" i="1" dirty="0">
                 <a:solidFill>
                   <a:srgbClr val="111111"/>
                 </a:solidFill>
@@ -15681,21 +16650,19 @@
                 <a:ea typeface="Times New Roman" pitchFamily="34" charset="-122"/>
                 <a:cs typeface="Times New Roman" pitchFamily="34" charset="-120"/>
               </a:rPr>
-              <a:t>Fill in the blanks:</a:t>
+              <a:t>The forests are conserved by the following efforts:</a:t>
             </a:r>
             <a:endParaRPr lang="en-US" sz="4000" dirty="0"/>
           </a:p>
           <a:p>
-            <a:pPr algn="l" marL="342900" indent="-342900">
+            <a:pPr algn="l" indent="0" marL="0">
               <a:spcAft>
                 <a:spcPts val="800"/>
               </a:spcAft>
-              <a:buSzPct val="100000"/>
-              <a:buFont typeface="+mj-lt"/>
-              <a:buAutoNum type="arabicPeriod" startAt="1"/>
+              <a:buNone/>
             </a:pPr>
             <a:r>
-              <a:rPr lang="en-US" sz="4000" dirty="0">
+              <a:rPr lang="en-US" sz="4000" b="1" dirty="0">
                 <a:solidFill>
                   <a:srgbClr val="111111"/>
                 </a:solidFill>
@@ -15703,18 +16670,13 @@
                 <a:ea typeface="Times New Roman" pitchFamily="34" charset="-122"/>
                 <a:cs typeface="Times New Roman" pitchFamily="34" charset="-120"/>
               </a:rPr>
-              <a:t>Cutting trees without permission is ______ logging.</a:t>
-            </a:r>
-            <a:endParaRPr lang="en-US" sz="4000" dirty="0"/>
-          </a:p>
-          <a:p>
-            <a:pPr algn="l" marL="342900" indent="-342900">
+              <a:t>The Forestry Law of 1994: </a:t>
+            </a:r>
+            <a:pPr algn="l" indent="0" marL="0">
               <a:spcAft>
                 <a:spcPts val="800"/>
               </a:spcAft>
-              <a:buSzPct val="100000"/>
-              <a:buFont typeface="+mj-lt"/>
-              <a:buAutoNum type="arabicPeriod" startAt="1"/>
+              <a:buNone/>
             </a:pPr>
             <a:r>
               <a:rPr lang="en-US" sz="4000" dirty="0">
@@ -15725,7 +16687,44 @@
                 <a:ea typeface="Times New Roman" pitchFamily="34" charset="-122"/>
                 <a:cs typeface="Times New Roman" pitchFamily="34" charset="-120"/>
               </a:rPr>
-              <a:t>The Forestry Law of Cameroon dates from ______.</a:t>
+              <a:t>It controls logging.</a:t>
+            </a:r>
+            <a:endParaRPr lang="en-US" sz="4000" dirty="0"/>
+          </a:p>
+          <a:p>
+            <a:pPr algn="l" indent="0" marL="0">
+              <a:spcAft>
+                <a:spcPts val="800"/>
+              </a:spcAft>
+              <a:buNone/>
+            </a:pPr>
+            <a:r>
+              <a:rPr lang="en-US" sz="4000" b="1" dirty="0">
+                <a:solidFill>
+                  <a:srgbClr val="111111"/>
+                </a:solidFill>
+                <a:latin typeface="Times New Roman" pitchFamily="34" charset="0"/>
+                <a:ea typeface="Times New Roman" pitchFamily="34" charset="-122"/>
+                <a:cs typeface="Times New Roman" pitchFamily="34" charset="-120"/>
+              </a:rPr>
+              <a:t>Management plans: </a:t>
+            </a:r>
+            <a:pPr algn="l" indent="0" marL="0">
+              <a:spcAft>
+                <a:spcPts val="800"/>
+              </a:spcAft>
+              <a:buNone/>
+            </a:pPr>
+            <a:r>
+              <a:rPr lang="en-US" sz="4000" dirty="0">
+                <a:solidFill>
+                  <a:srgbClr val="111111"/>
+                </a:solidFill>
+                <a:latin typeface="Times New Roman" pitchFamily="34" charset="0"/>
+                <a:ea typeface="Times New Roman" pitchFamily="34" charset="-122"/>
+                <a:cs typeface="Times New Roman" pitchFamily="34" charset="-120"/>
+              </a:rPr>
+              <a:t>Companies must cut only some trees.</a:t>
             </a:r>
             <a:endParaRPr lang="en-US" sz="4000" dirty="0"/>
           </a:p>
@@ -15837,7 +16836,7 @@
                 <a:ea typeface="Calibri" pitchFamily="34" charset="-122"/>
                 <a:cs typeface="Calibri" pitchFamily="34" charset="-120"/>
               </a:rPr>
-              <a:t>REMEDIATION</a:t>
+              <a:t>BOARD SUMMARY</a:t>
             </a:r>
             <a:endParaRPr lang="en-US" sz="1400" dirty="0"/>
           </a:p>
@@ -15902,7 +16901,7 @@
                 <a:ea typeface="Times New Roman" pitchFamily="34" charset="-122"/>
                 <a:cs typeface="Times New Roman" pitchFamily="34" charset="-120"/>
               </a:rPr>
-              <a:t>Remediation (continued)</a:t>
+              <a:t>3. Problems and Conservation Efforts</a:t>
             </a:r>
             <a:endParaRPr lang="en-US" sz="3600" dirty="0"/>
           </a:p>
@@ -15916,8 +16915,8 @@
         </p:nvSpPr>
         <p:spPr>
           <a:xfrm>
-            <a:off x="5349240" y="1783080"/>
-            <a:ext cx="6522415" cy="4663440"/>
+            <a:off x="5349240" y="1737360"/>
+            <a:ext cx="6522415" cy="457200"/>
           </a:xfrm>
           <a:prstGeom prst="rect">
             <a:avLst/>
@@ -15926,27 +16925,118 @@
           <a:ln/>
         </p:spPr>
         <p:txBody>
-          <a:bodyPr wrap="square" lIns="0" tIns="0" rIns="0" bIns="0" rtlCol="0" anchor="t"/>
-          <a:lstStyle/>
-          <a:p>
-            <a:pPr algn="l" marL="342900" indent="-342900">
-              <a:spcAft>
-                <a:spcPts val="800"/>
-              </a:spcAft>
-              <a:buSzPct val="100000"/>
-              <a:buFont typeface="+mj-lt"/>
-              <a:buAutoNum type="arabicPeriod" startAt="1"/>
+          <a:bodyPr wrap="square" lIns="0" tIns="0" rIns="0" bIns="0" rtlCol="0" anchor="ctr"/>
+          <a:lstStyle/>
+          <a:p>
+            <a:pPr algn="l" indent="0" marL="0">
+              <a:buNone/>
             </a:pPr>
             <a:r>
-              <a:rPr lang="en-US" sz="4000" dirty="0">
-                <a:solidFill>
-                  <a:srgbClr val="111111"/>
+              <a:rPr lang="en-US" sz="2900" b="1" dirty="0">
+                <a:solidFill>
+                  <a:srgbClr val="990011"/>
                 </a:solidFill>
                 <a:latin typeface="Times New Roman" pitchFamily="34" charset="0"/>
                 <a:ea typeface="Times New Roman" pitchFamily="34" charset="-122"/>
                 <a:cs typeface="Times New Roman" pitchFamily="34" charset="-120"/>
               </a:rPr>
-              <a:t>Logs are exported through the port of ______.</a:t>
+              <a:t>B) Conservation Efforts (continued)</a:t>
+            </a:r>
+            <a:endParaRPr lang="en-US" sz="2900" dirty="0"/>
+          </a:p>
+        </p:txBody>
+      </p:sp>
+      <p:sp>
+        <p:nvSpPr>
+          <p:cNvPr id="6" name="Text 3"/>
+          <p:cNvSpPr/>
+          <p:nvPr/>
+        </p:nvSpPr>
+        <p:spPr>
+          <a:xfrm>
+            <a:off x="5349240" y="2240280"/>
+            <a:ext cx="6522415" cy="4206240"/>
+          </a:xfrm>
+          <a:prstGeom prst="rect">
+            <a:avLst/>
+          </a:prstGeom>
+          <a:noFill/>
+          <a:ln/>
+        </p:spPr>
+        <p:txBody>
+          <a:bodyPr wrap="square" lIns="0" tIns="0" rIns="0" bIns="0" rtlCol="0" anchor="t"/>
+          <a:lstStyle/>
+          <a:p>
+            <a:pPr algn="l" indent="0" marL="0">
+              <a:spcAft>
+                <a:spcPts val="800"/>
+              </a:spcAft>
+              <a:buNone/>
+            </a:pPr>
+            <a:r>
+              <a:rPr lang="en-US" sz="4000" b="1" dirty="0">
+                <a:solidFill>
+                  <a:srgbClr val="111111"/>
+                </a:solidFill>
+                <a:latin typeface="Times New Roman" pitchFamily="34" charset="0"/>
+                <a:ea typeface="Times New Roman" pitchFamily="34" charset="-122"/>
+                <a:cs typeface="Times New Roman" pitchFamily="34" charset="-120"/>
+              </a:rPr>
+              <a:t>Reforestation: </a:t>
+            </a:r>
+            <a:pPr algn="l" indent="0" marL="0">
+              <a:spcAft>
+                <a:spcPts val="800"/>
+              </a:spcAft>
+              <a:buNone/>
+            </a:pPr>
+            <a:r>
+              <a:rPr lang="en-US" sz="4000" dirty="0">
+                <a:solidFill>
+                  <a:srgbClr val="111111"/>
+                </a:solidFill>
+                <a:latin typeface="Times New Roman" pitchFamily="34" charset="0"/>
+                <a:ea typeface="Times New Roman" pitchFamily="34" charset="-122"/>
+                <a:cs typeface="Times New Roman" pitchFamily="34" charset="-120"/>
+              </a:rPr>
+              <a:t>Trees are planted again.</a:t>
+            </a:r>
+            <a:endParaRPr lang="en-US" sz="4000" dirty="0"/>
+          </a:p>
+          <a:p>
+            <a:pPr algn="l" indent="0" marL="0">
+              <a:spcAft>
+                <a:spcPts val="800"/>
+              </a:spcAft>
+              <a:buNone/>
+            </a:pPr>
+            <a:r>
+              <a:rPr lang="en-US" sz="4000" b="1" dirty="0">
+                <a:solidFill>
+                  <a:srgbClr val="111111"/>
+                </a:solidFill>
+                <a:latin typeface="Times New Roman" pitchFamily="34" charset="0"/>
+                <a:ea typeface="Times New Roman" pitchFamily="34" charset="-122"/>
+                <a:cs typeface="Times New Roman" pitchFamily="34" charset="-120"/>
+              </a:rPr>
+              <a:t>Protected areas: </a:t>
+            </a:r>
+            <a:pPr algn="l" indent="0" marL="0">
+              <a:spcAft>
+                <a:spcPts val="800"/>
+              </a:spcAft>
+              <a:buNone/>
+            </a:pPr>
+            <a:r>
+              <a:rPr lang="en-US" sz="4000" dirty="0">
+                <a:solidFill>
+                  <a:srgbClr val="111111"/>
+                </a:solidFill>
+                <a:latin typeface="Times New Roman" pitchFamily="34" charset="0"/>
+                <a:ea typeface="Times New Roman" pitchFamily="34" charset="-122"/>
+                <a:cs typeface="Times New Roman" pitchFamily="34" charset="-120"/>
+              </a:rPr>
+              <a:t>Reserves such as the Dja protect the forest.</a:t>
             </a:r>
             <a:endParaRPr lang="en-US" sz="4000" dirty="0"/>
           </a:p>
@@ -16058,7 +17148,7 @@
                 <a:ea typeface="Calibri" pitchFamily="34" charset="-122"/>
                 <a:cs typeface="Calibri" pitchFamily="34" charset="-120"/>
               </a:rPr>
-              <a:t>HOMEWORK</a:t>
+              <a:t>FORMATIVE EVALUATION</a:t>
             </a:r>
             <a:endParaRPr lang="en-US" sz="1400" dirty="0"/>
           </a:p>
@@ -16123,7 +17213,7 @@
                 <a:ea typeface="Times New Roman" pitchFamily="34" charset="-122"/>
                 <a:cs typeface="Times New Roman" pitchFamily="34" charset="-120"/>
               </a:rPr>
-              <a:t>Homework</a:t>
+              <a:t>Evaluation 1</a:t>
             </a:r>
             <a:endParaRPr lang="en-US" sz="3600" dirty="0"/>
           </a:p>
@@ -16165,7 +17255,7 @@
                 <a:ea typeface="Times New Roman" pitchFamily="34" charset="-122"/>
                 <a:cs typeface="Times New Roman" pitchFamily="34" charset="-120"/>
               </a:rPr>
-              <a:t>Name three valuable trees of the forests of Cameroon and one use of each.</a:t>
+              <a:t>Where are the main forests of Cameroon?</a:t>
             </a:r>
             <a:endParaRPr lang="en-US" sz="4000" dirty="0"/>
           </a:p>
@@ -16277,7 +17367,7 @@
                 <a:ea typeface="Calibri" pitchFamily="34" charset="-122"/>
                 <a:cs typeface="Calibri" pitchFamily="34" charset="-120"/>
               </a:rPr>
-              <a:t>NEXT LESSON</a:t>
+              <a:t>FORMATIVE EVALUATION</a:t>
             </a:r>
             <a:endParaRPr lang="en-US" sz="1400" dirty="0"/>
           </a:p>
@@ -16342,7 +17432,7 @@
                 <a:ea typeface="Times New Roman" pitchFamily="34" charset="-122"/>
                 <a:cs typeface="Times New Roman" pitchFamily="34" charset="-120"/>
               </a:rPr>
-              <a:t>Next Lesson</a:t>
+              <a:t>Expected Answer</a:t>
             </a:r>
             <a:endParaRPr lang="en-US" sz="3600" dirty="0"/>
           </a:p>
@@ -16366,17 +17456,17 @@
           <a:ln/>
         </p:spPr>
         <p:txBody>
-          <a:bodyPr wrap="square" lIns="0" tIns="0" rIns="0" bIns="0" rtlCol="0" anchor="ctr"/>
-          <a:lstStyle/>
-          <a:p>
-            <a:pPr algn="ctr" indent="0" marL="0">
+          <a:bodyPr wrap="square" lIns="0" tIns="0" rIns="0" bIns="0" rtlCol="0" anchor="t"/>
+          <a:lstStyle/>
+          <a:p>
+            <a:pPr algn="l" indent="0" marL="0">
               <a:spcAft>
                 <a:spcPts val="800"/>
               </a:spcAft>
               <a:buNone/>
             </a:pPr>
             <a:r>
-              <a:rPr lang="en-US" sz="4000" b="1" dirty="0">
+              <a:rPr lang="en-US" sz="4000" dirty="0">
                 <a:solidFill>
                   <a:srgbClr val="111111"/>
                 </a:solidFill>
@@ -16384,27 +17474,7 @@
                 <a:ea typeface="Times New Roman" pitchFamily="34" charset="-122"/>
                 <a:cs typeface="Times New Roman" pitchFamily="34" charset="-120"/>
               </a:rPr>
-              <a:t>Our next lesson will be on:</a:t>
-            </a:r>
-            <a:endParaRPr lang="en-US" sz="4000" dirty="0"/>
-          </a:p>
-          <a:p>
-            <a:pPr algn="ctr" indent="0" marL="0">
-              <a:spcAft>
-                <a:spcPts val="800"/>
-              </a:spcAft>
-              <a:buNone/>
-            </a:pPr>
-            <a:r>
-              <a:rPr lang="en-US" sz="4000" b="1" dirty="0">
-                <a:solidFill>
-                  <a:srgbClr val="990011"/>
-                </a:solidFill>
-                <a:latin typeface="Times New Roman" pitchFamily="34" charset="0"/>
-                <a:ea typeface="Times New Roman" pitchFamily="34" charset="-122"/>
-                <a:cs typeface="Times New Roman" pitchFamily="34" charset="-120"/>
-              </a:rPr>
-              <a:t>Further Study 2: Deforestation in Cameroon and its Consequences</a:t>
+              <a:t>In the South, East and Centre.</a:t>
             </a:r>
             <a:endParaRPr lang="en-US" sz="4000" dirty="0"/>
           </a:p>
@@ -16516,6 +17586,1605 @@
                 <a:ea typeface="Calibri" pitchFamily="34" charset="-122"/>
                 <a:cs typeface="Calibri" pitchFamily="34" charset="-120"/>
               </a:rPr>
+              <a:t>FORMATIVE EVALUATION</a:t>
+            </a:r>
+            <a:endParaRPr lang="en-US" sz="1400" dirty="0"/>
+          </a:p>
+        </p:txBody>
+      </p:sp>
+      <p:pic>
+        <p:nvPicPr>
+          <p:cNvPr id="3" name="Image 0" descr="/home/claude/f4/img/minesec_sheet.png">    </p:cNvPr>
+          <p:cNvPicPr>
+            <a:picLocks noChangeAspect="1"/>
+          </p:cNvPicPr>
+          <p:nvPr/>
+        </p:nvPicPr>
+        <p:blipFill>
+          <a:blip r:embed="rId1"/>
+          <a:stretch>
+            <a:fillRect/>
+          </a:stretch>
+        </p:blipFill>
+        <p:spPr>
+          <a:xfrm>
+            <a:off x="0" y="658368"/>
+            <a:ext cx="5120640" cy="5833872"/>
+          </a:xfrm>
+          <a:prstGeom prst="rect">
+            <a:avLst/>
+          </a:prstGeom>
+        </p:spPr>
+      </p:pic>
+      <p:sp>
+        <p:nvSpPr>
+          <p:cNvPr id="4" name="Text 1"/>
+          <p:cNvSpPr/>
+          <p:nvPr/>
+        </p:nvSpPr>
+        <p:spPr>
+          <a:xfrm>
+            <a:off x="5349240" y="1005840"/>
+            <a:ext cx="6522415" cy="731520"/>
+          </a:xfrm>
+          <a:prstGeom prst="rect">
+            <a:avLst/>
+          </a:prstGeom>
+          <a:noFill/>
+          <a:ln/>
+        </p:spPr>
+        <p:txBody>
+          <a:bodyPr wrap="square" lIns="0" tIns="0" rIns="0" bIns="0" rtlCol="0" anchor="ctr">
+            <a:normAutofit/>
+          </a:bodyPr>
+          <a:lstStyle/>
+          <a:p>
+            <a:pPr algn="ctr" indent="0" marL="0">
+              <a:buNone/>
+            </a:pPr>
+            <a:r>
+              <a:rPr lang="en-US" sz="3600" b="1" dirty="0">
+                <a:solidFill>
+                  <a:srgbClr val="990011"/>
+                </a:solidFill>
+                <a:latin typeface="Times New Roman" pitchFamily="34" charset="0"/>
+                <a:ea typeface="Times New Roman" pitchFamily="34" charset="-122"/>
+                <a:cs typeface="Times New Roman" pitchFamily="34" charset="-120"/>
+              </a:rPr>
+              <a:t>Evaluation 2</a:t>
+            </a:r>
+            <a:endParaRPr lang="en-US" sz="3600" dirty="0"/>
+          </a:p>
+        </p:txBody>
+      </p:sp>
+      <p:sp>
+        <p:nvSpPr>
+          <p:cNvPr id="5" name="Text 2"/>
+          <p:cNvSpPr/>
+          <p:nvPr/>
+        </p:nvSpPr>
+        <p:spPr>
+          <a:xfrm>
+            <a:off x="5349240" y="1783080"/>
+            <a:ext cx="6522415" cy="4663440"/>
+          </a:xfrm>
+          <a:prstGeom prst="rect">
+            <a:avLst/>
+          </a:prstGeom>
+          <a:noFill/>
+          <a:ln/>
+        </p:spPr>
+        <p:txBody>
+          <a:bodyPr wrap="square" lIns="0" tIns="0" rIns="0" bIns="0" rtlCol="0" anchor="t"/>
+          <a:lstStyle/>
+          <a:p>
+            <a:pPr algn="l" indent="0" marL="0">
+              <a:spcAft>
+                <a:spcPts val="800"/>
+              </a:spcAft>
+              <a:buNone/>
+            </a:pPr>
+            <a:r>
+              <a:rPr lang="en-US" sz="4000" dirty="0">
+                <a:solidFill>
+                  <a:srgbClr val="111111"/>
+                </a:solidFill>
+                <a:latin typeface="Times New Roman" pitchFamily="34" charset="0"/>
+                <a:ea typeface="Times New Roman" pitchFamily="34" charset="-122"/>
+                <a:cs typeface="Times New Roman" pitchFamily="34" charset="-120"/>
+              </a:rPr>
+              <a:t>Give two conservation efforts.</a:t>
+            </a:r>
+            <a:endParaRPr lang="en-US" sz="4000" dirty="0"/>
+          </a:p>
+        </p:txBody>
+      </p:sp>
+      <p:sp>
+        <p:nvSpPr>
+          <p:cNvPr id="25" name="Slide Number Placeholder 0"/>
+          <p:cNvSpPr>
+            <a:spLocks noGrp="1"/>
+          </p:cNvSpPr>
+          <p:nvPr>
+            <p:ph type="sldNum" sz="quarter" idx="4294967295"/>
+          </p:nvPr>
+        </p:nvSpPr>
+        <p:spPr>
+          <a:xfrm>
+            <a:off x="27432" y="91440"/>
+            <a:ext cx="585216" cy="475488"/>
+          </a:xfrm>
+          <a:prstGeom prst="rect">
+            <a:avLst/>
+          </a:prstGeom>
+          <a:extLst>
+            <a:ext uri="{C572A759-6A51-4108-AA02-DFA0A04FC94B}">
+              <ma14:wrappingTextBoxFlag xmlns:ma14="http://schemas.microsoft.com/office/mac/drawingml/2011/main" val="0"/>
+            </a:ext>
+          </a:extLst>
+        </p:spPr>
+        <p:txBody>
+          <a:bodyPr/>
+          <a:lstStyle>
+            <a:lvl1pPr>
+              <a:defRPr sz="2000">
+                <a:solidFill>
+                  <a:srgbClr val="FFFFFF"/>
+                </a:solidFill>
+                <a:latin typeface="Calibri"/>
+                <a:ea typeface="Calibri"/>
+                <a:cs typeface="Calibri"/>
+              </a:defRPr>
+            </a:lvl1pPr>
+          </a:lstStyle>
+          <a:p>
+            <a:pPr algn="ctr"/>
+            <a:fld id="{F7021451-1387-4CA6-816F-3879F97B5CBC}" type="slidenum">
+              <a:rPr b="1" lang="en-US"/>
+              <a:t>47</a:t>
+            </a:fld>
+            <a:endParaRPr lang="en-US"/>
+          </a:p>
+        </p:txBody>
+      </p:sp>
+    </p:spTree>
+  </p:cSld>
+  <p:clrMapOvr>
+    <a:masterClrMapping/>
+  </p:clrMapOvr>
+</p:sld>
+</file>
+
+<file path=ppt/slides/slide48.xml><?xml version="1.0" encoding="utf-8"?>
+<p:sld xmlns:a="http://schemas.openxmlformats.org/drawingml/2006/main" xmlns:r="http://schemas.openxmlformats.org/officeDocument/2006/relationships" xmlns:p="http://schemas.openxmlformats.org/presentationml/2006/main">
+  <p:cSld name="Slide 48">
+    <p:spTree>
+      <p:nvGrpSpPr>
+        <p:cNvPr id="1" name=""/>
+        <p:cNvGrpSpPr/>
+        <p:nvPr/>
+      </p:nvGrpSpPr>
+      <p:grpSpPr>
+        <a:xfrm>
+          <a:off x="0" y="0"/>
+          <a:ext cx="0" cy="0"/>
+          <a:chOff x="0" y="0"/>
+          <a:chExt cx="0" cy="0"/>
+        </a:xfrm>
+      </p:grpSpPr>
+      <p:sp>
+        <p:nvSpPr>
+          <p:cNvPr id="2" name="Text 0"/>
+          <p:cNvSpPr/>
+          <p:nvPr/>
+        </p:nvSpPr>
+        <p:spPr>
+          <a:xfrm>
+            <a:off x="457200" y="713232"/>
+            <a:ext cx="11368735" cy="274320"/>
+          </a:xfrm>
+          <a:prstGeom prst="rect">
+            <a:avLst/>
+          </a:prstGeom>
+          <a:noFill/>
+          <a:ln/>
+        </p:spPr>
+        <p:txBody>
+          <a:bodyPr wrap="square" lIns="0" tIns="0" rIns="0" bIns="0" rtlCol="0" anchor="ctr"/>
+          <a:lstStyle/>
+          <a:p>
+            <a:pPr algn="r" indent="0" marL="0">
+              <a:buNone/>
+            </a:pPr>
+            <a:r>
+              <a:rPr lang="en-US" sz="1400" b="1" dirty="0">
+                <a:solidFill>
+                  <a:srgbClr val="1C3F6E"/>
+                </a:solidFill>
+                <a:latin typeface="Calibri" pitchFamily="34" charset="0"/>
+                <a:ea typeface="Calibri" pitchFamily="34" charset="-122"/>
+                <a:cs typeface="Calibri" pitchFamily="34" charset="-120"/>
+              </a:rPr>
+              <a:t>FORMATIVE EVALUATION</a:t>
+            </a:r>
+            <a:endParaRPr lang="en-US" sz="1400" dirty="0"/>
+          </a:p>
+        </p:txBody>
+      </p:sp>
+      <p:pic>
+        <p:nvPicPr>
+          <p:cNvPr id="3" name="Image 0" descr="/home/claude/f4/img/minesec_sheet.png">    </p:cNvPr>
+          <p:cNvPicPr>
+            <a:picLocks noChangeAspect="1"/>
+          </p:cNvPicPr>
+          <p:nvPr/>
+        </p:nvPicPr>
+        <p:blipFill>
+          <a:blip r:embed="rId1"/>
+          <a:stretch>
+            <a:fillRect/>
+          </a:stretch>
+        </p:blipFill>
+        <p:spPr>
+          <a:xfrm>
+            <a:off x="0" y="658368"/>
+            <a:ext cx="5120640" cy="5833872"/>
+          </a:xfrm>
+          <a:prstGeom prst="rect">
+            <a:avLst/>
+          </a:prstGeom>
+        </p:spPr>
+      </p:pic>
+      <p:sp>
+        <p:nvSpPr>
+          <p:cNvPr id="4" name="Text 1"/>
+          <p:cNvSpPr/>
+          <p:nvPr/>
+        </p:nvSpPr>
+        <p:spPr>
+          <a:xfrm>
+            <a:off x="5349240" y="1005840"/>
+            <a:ext cx="6522415" cy="731520"/>
+          </a:xfrm>
+          <a:prstGeom prst="rect">
+            <a:avLst/>
+          </a:prstGeom>
+          <a:noFill/>
+          <a:ln/>
+        </p:spPr>
+        <p:txBody>
+          <a:bodyPr wrap="square" lIns="0" tIns="0" rIns="0" bIns="0" rtlCol="0" anchor="ctr">
+            <a:normAutofit/>
+          </a:bodyPr>
+          <a:lstStyle/>
+          <a:p>
+            <a:pPr algn="ctr" indent="0" marL="0">
+              <a:buNone/>
+            </a:pPr>
+            <a:r>
+              <a:rPr lang="en-US" sz="3600" b="1" dirty="0">
+                <a:solidFill>
+                  <a:srgbClr val="990011"/>
+                </a:solidFill>
+                <a:latin typeface="Times New Roman" pitchFamily="34" charset="0"/>
+                <a:ea typeface="Times New Roman" pitchFamily="34" charset="-122"/>
+                <a:cs typeface="Times New Roman" pitchFamily="34" charset="-120"/>
+              </a:rPr>
+              <a:t>Expected Answer</a:t>
+            </a:r>
+            <a:endParaRPr lang="en-US" sz="3600" dirty="0"/>
+          </a:p>
+        </p:txBody>
+      </p:sp>
+      <p:sp>
+        <p:nvSpPr>
+          <p:cNvPr id="5" name="Text 2"/>
+          <p:cNvSpPr/>
+          <p:nvPr/>
+        </p:nvSpPr>
+        <p:spPr>
+          <a:xfrm>
+            <a:off x="5349240" y="1783080"/>
+            <a:ext cx="6522415" cy="4663440"/>
+          </a:xfrm>
+          <a:prstGeom prst="rect">
+            <a:avLst/>
+          </a:prstGeom>
+          <a:noFill/>
+          <a:ln/>
+        </p:spPr>
+        <p:txBody>
+          <a:bodyPr wrap="square" lIns="0" tIns="0" rIns="0" bIns="0" rtlCol="0" anchor="t"/>
+          <a:lstStyle/>
+          <a:p>
+            <a:pPr algn="l" indent="0" marL="0">
+              <a:spcAft>
+                <a:spcPts val="800"/>
+              </a:spcAft>
+              <a:buNone/>
+            </a:pPr>
+            <a:r>
+              <a:rPr lang="en-US" sz="4000" dirty="0">
+                <a:solidFill>
+                  <a:srgbClr val="111111"/>
+                </a:solidFill>
+                <a:latin typeface="Times New Roman" pitchFamily="34" charset="0"/>
+                <a:ea typeface="Times New Roman" pitchFamily="34" charset="-122"/>
+                <a:cs typeface="Times New Roman" pitchFamily="34" charset="-120"/>
+              </a:rPr>
+              <a:t>The Forestry Law and protected areas.</a:t>
+            </a:r>
+            <a:endParaRPr lang="en-US" sz="4000" dirty="0"/>
+          </a:p>
+        </p:txBody>
+      </p:sp>
+      <p:sp>
+        <p:nvSpPr>
+          <p:cNvPr id="25" name="Slide Number Placeholder 0"/>
+          <p:cNvSpPr>
+            <a:spLocks noGrp="1"/>
+          </p:cNvSpPr>
+          <p:nvPr>
+            <p:ph type="sldNum" sz="quarter" idx="4294967295"/>
+          </p:nvPr>
+        </p:nvSpPr>
+        <p:spPr>
+          <a:xfrm>
+            <a:off x="27432" y="91440"/>
+            <a:ext cx="585216" cy="475488"/>
+          </a:xfrm>
+          <a:prstGeom prst="rect">
+            <a:avLst/>
+          </a:prstGeom>
+          <a:extLst>
+            <a:ext uri="{C572A759-6A51-4108-AA02-DFA0A04FC94B}">
+              <ma14:wrappingTextBoxFlag xmlns:ma14="http://schemas.microsoft.com/office/mac/drawingml/2011/main" val="0"/>
+            </a:ext>
+          </a:extLst>
+        </p:spPr>
+        <p:txBody>
+          <a:bodyPr/>
+          <a:lstStyle>
+            <a:lvl1pPr>
+              <a:defRPr sz="2000">
+                <a:solidFill>
+                  <a:srgbClr val="FFFFFF"/>
+                </a:solidFill>
+                <a:latin typeface="Calibri"/>
+                <a:ea typeface="Calibri"/>
+                <a:cs typeface="Calibri"/>
+              </a:defRPr>
+            </a:lvl1pPr>
+          </a:lstStyle>
+          <a:p>
+            <a:pPr algn="ctr"/>
+            <a:fld id="{F7021451-1387-4CA6-816F-3879F97B5CBC}" type="slidenum">
+              <a:rPr b="1" lang="en-US"/>
+              <a:t>48</a:t>
+            </a:fld>
+            <a:endParaRPr lang="en-US"/>
+          </a:p>
+        </p:txBody>
+      </p:sp>
+    </p:spTree>
+  </p:cSld>
+  <p:clrMapOvr>
+    <a:masterClrMapping/>
+  </p:clrMapOvr>
+</p:sld>
+</file>
+
+<file path=ppt/slides/slide49.xml><?xml version="1.0" encoding="utf-8"?>
+<p:sld xmlns:a="http://schemas.openxmlformats.org/drawingml/2006/main" xmlns:r="http://schemas.openxmlformats.org/officeDocument/2006/relationships" xmlns:p="http://schemas.openxmlformats.org/presentationml/2006/main">
+  <p:cSld name="Slide 49">
+    <p:spTree>
+      <p:nvGrpSpPr>
+        <p:cNvPr id="1" name=""/>
+        <p:cNvGrpSpPr/>
+        <p:nvPr/>
+      </p:nvGrpSpPr>
+      <p:grpSpPr>
+        <a:xfrm>
+          <a:off x="0" y="0"/>
+          <a:ext cx="0" cy="0"/>
+          <a:chOff x="0" y="0"/>
+          <a:chExt cx="0" cy="0"/>
+        </a:xfrm>
+      </p:grpSpPr>
+      <p:sp>
+        <p:nvSpPr>
+          <p:cNvPr id="2" name="Text 0"/>
+          <p:cNvSpPr/>
+          <p:nvPr/>
+        </p:nvSpPr>
+        <p:spPr>
+          <a:xfrm>
+            <a:off x="457200" y="713232"/>
+            <a:ext cx="11368735" cy="274320"/>
+          </a:xfrm>
+          <a:prstGeom prst="rect">
+            <a:avLst/>
+          </a:prstGeom>
+          <a:noFill/>
+          <a:ln/>
+        </p:spPr>
+        <p:txBody>
+          <a:bodyPr wrap="square" lIns="0" tIns="0" rIns="0" bIns="0" rtlCol="0" anchor="ctr"/>
+          <a:lstStyle/>
+          <a:p>
+            <a:pPr algn="r" indent="0" marL="0">
+              <a:buNone/>
+            </a:pPr>
+            <a:r>
+              <a:rPr lang="en-US" sz="1400" b="1" dirty="0">
+                <a:solidFill>
+                  <a:srgbClr val="1C3F6E"/>
+                </a:solidFill>
+                <a:latin typeface="Calibri" pitchFamily="34" charset="0"/>
+                <a:ea typeface="Calibri" pitchFamily="34" charset="-122"/>
+                <a:cs typeface="Calibri" pitchFamily="34" charset="-120"/>
+              </a:rPr>
+              <a:t>REMEDIATION</a:t>
+            </a:r>
+            <a:endParaRPr lang="en-US" sz="1400" dirty="0"/>
+          </a:p>
+        </p:txBody>
+      </p:sp>
+      <p:pic>
+        <p:nvPicPr>
+          <p:cNvPr id="3" name="Image 0" descr="/home/claude/f4/img/minesec_sheet.png">    </p:cNvPr>
+          <p:cNvPicPr>
+            <a:picLocks noChangeAspect="1"/>
+          </p:cNvPicPr>
+          <p:nvPr/>
+        </p:nvPicPr>
+        <p:blipFill>
+          <a:blip r:embed="rId1"/>
+          <a:stretch>
+            <a:fillRect/>
+          </a:stretch>
+        </p:blipFill>
+        <p:spPr>
+          <a:xfrm>
+            <a:off x="0" y="658368"/>
+            <a:ext cx="5120640" cy="5833872"/>
+          </a:xfrm>
+          <a:prstGeom prst="rect">
+            <a:avLst/>
+          </a:prstGeom>
+        </p:spPr>
+      </p:pic>
+      <p:sp>
+        <p:nvSpPr>
+          <p:cNvPr id="4" name="Text 1"/>
+          <p:cNvSpPr/>
+          <p:nvPr/>
+        </p:nvSpPr>
+        <p:spPr>
+          <a:xfrm>
+            <a:off x="5349240" y="1005840"/>
+            <a:ext cx="6522415" cy="731520"/>
+          </a:xfrm>
+          <a:prstGeom prst="rect">
+            <a:avLst/>
+          </a:prstGeom>
+          <a:noFill/>
+          <a:ln/>
+        </p:spPr>
+        <p:txBody>
+          <a:bodyPr wrap="square" lIns="0" tIns="0" rIns="0" bIns="0" rtlCol="0" anchor="ctr">
+            <a:normAutofit/>
+          </a:bodyPr>
+          <a:lstStyle/>
+          <a:p>
+            <a:pPr algn="ctr" indent="0" marL="0">
+              <a:buNone/>
+            </a:pPr>
+            <a:r>
+              <a:rPr lang="en-US" sz="3600" b="1" dirty="0">
+                <a:solidFill>
+                  <a:srgbClr val="990011"/>
+                </a:solidFill>
+                <a:latin typeface="Times New Roman" pitchFamily="34" charset="0"/>
+                <a:ea typeface="Times New Roman" pitchFamily="34" charset="-122"/>
+                <a:cs typeface="Times New Roman" pitchFamily="34" charset="-120"/>
+              </a:rPr>
+              <a:t>Remediation</a:t>
+            </a:r>
+            <a:endParaRPr lang="en-US" sz="3600" dirty="0"/>
+          </a:p>
+        </p:txBody>
+      </p:sp>
+      <p:sp>
+        <p:nvSpPr>
+          <p:cNvPr id="5" name="Text 2"/>
+          <p:cNvSpPr/>
+          <p:nvPr/>
+        </p:nvSpPr>
+        <p:spPr>
+          <a:xfrm>
+            <a:off x="5349240" y="1783080"/>
+            <a:ext cx="6522415" cy="4663440"/>
+          </a:xfrm>
+          <a:prstGeom prst="rect">
+            <a:avLst/>
+          </a:prstGeom>
+          <a:noFill/>
+          <a:ln/>
+        </p:spPr>
+        <p:txBody>
+          <a:bodyPr wrap="square" lIns="0" tIns="0" rIns="0" bIns="0" rtlCol="0" anchor="t"/>
+          <a:lstStyle/>
+          <a:p>
+            <a:pPr algn="l" indent="0" marL="0">
+              <a:spcAft>
+                <a:spcPts val="800"/>
+              </a:spcAft>
+              <a:buNone/>
+            </a:pPr>
+            <a:r>
+              <a:rPr lang="en-US" sz="4000" b="1" dirty="0">
+                <a:solidFill>
+                  <a:srgbClr val="111111"/>
+                </a:solidFill>
+                <a:latin typeface="Times New Roman" pitchFamily="34" charset="0"/>
+                <a:ea typeface="Times New Roman" pitchFamily="34" charset="-122"/>
+                <a:cs typeface="Times New Roman" pitchFamily="34" charset="-120"/>
+              </a:rPr>
+              <a:t>Fill in the blanks:</a:t>
+            </a:r>
+            <a:endParaRPr lang="en-US" sz="4000" dirty="0"/>
+          </a:p>
+          <a:p>
+            <a:pPr algn="l" marL="342900" indent="-342900">
+              <a:spcAft>
+                <a:spcPts val="800"/>
+              </a:spcAft>
+              <a:buSzPct val="100000"/>
+              <a:buFont typeface="+mj-lt"/>
+              <a:buAutoNum type="arabicPeriod" startAt="1"/>
+            </a:pPr>
+            <a:r>
+              <a:rPr lang="en-US" sz="4000" dirty="0">
+                <a:solidFill>
+                  <a:srgbClr val="111111"/>
+                </a:solidFill>
+                <a:latin typeface="Times New Roman" pitchFamily="34" charset="0"/>
+                <a:ea typeface="Times New Roman" pitchFamily="34" charset="-122"/>
+                <a:cs typeface="Times New Roman" pitchFamily="34" charset="-120"/>
+              </a:rPr>
+              <a:t>Cutting trees without permission is ______ logging.</a:t>
+            </a:r>
+            <a:endParaRPr lang="en-US" sz="4000" dirty="0"/>
+          </a:p>
+          <a:p>
+            <a:pPr algn="l" marL="342900" indent="-342900">
+              <a:spcAft>
+                <a:spcPts val="800"/>
+              </a:spcAft>
+              <a:buSzPct val="100000"/>
+              <a:buFont typeface="+mj-lt"/>
+              <a:buAutoNum type="arabicPeriod" startAt="1"/>
+            </a:pPr>
+            <a:r>
+              <a:rPr lang="en-US" sz="4000" dirty="0">
+                <a:solidFill>
+                  <a:srgbClr val="111111"/>
+                </a:solidFill>
+                <a:latin typeface="Times New Roman" pitchFamily="34" charset="0"/>
+                <a:ea typeface="Times New Roman" pitchFamily="34" charset="-122"/>
+                <a:cs typeface="Times New Roman" pitchFamily="34" charset="-120"/>
+              </a:rPr>
+              <a:t>The Forestry Law of Cameroon dates from ______.</a:t>
+            </a:r>
+            <a:endParaRPr lang="en-US" sz="4000" dirty="0"/>
+          </a:p>
+        </p:txBody>
+      </p:sp>
+      <p:sp>
+        <p:nvSpPr>
+          <p:cNvPr id="25" name="Slide Number Placeholder 0"/>
+          <p:cNvSpPr>
+            <a:spLocks noGrp="1"/>
+          </p:cNvSpPr>
+          <p:nvPr>
+            <p:ph type="sldNum" sz="quarter" idx="4294967295"/>
+          </p:nvPr>
+        </p:nvSpPr>
+        <p:spPr>
+          <a:xfrm>
+            <a:off x="27432" y="91440"/>
+            <a:ext cx="585216" cy="475488"/>
+          </a:xfrm>
+          <a:prstGeom prst="rect">
+            <a:avLst/>
+          </a:prstGeom>
+          <a:extLst>
+            <a:ext uri="{C572A759-6A51-4108-AA02-DFA0A04FC94B}">
+              <ma14:wrappingTextBoxFlag xmlns:ma14="http://schemas.microsoft.com/office/mac/drawingml/2011/main" val="0"/>
+            </a:ext>
+          </a:extLst>
+        </p:spPr>
+        <p:txBody>
+          <a:bodyPr/>
+          <a:lstStyle>
+            <a:lvl1pPr>
+              <a:defRPr sz="2000">
+                <a:solidFill>
+                  <a:srgbClr val="FFFFFF"/>
+                </a:solidFill>
+                <a:latin typeface="Calibri"/>
+                <a:ea typeface="Calibri"/>
+                <a:cs typeface="Calibri"/>
+              </a:defRPr>
+            </a:lvl1pPr>
+          </a:lstStyle>
+          <a:p>
+            <a:pPr algn="ctr"/>
+            <a:fld id="{F7021451-1387-4CA6-816F-3879F97B5CBC}" type="slidenum">
+              <a:rPr b="1" lang="en-US"/>
+              <a:t>49</a:t>
+            </a:fld>
+            <a:endParaRPr lang="en-US"/>
+          </a:p>
+        </p:txBody>
+      </p:sp>
+    </p:spTree>
+  </p:cSld>
+  <p:clrMapOvr>
+    <a:masterClrMapping/>
+  </p:clrMapOvr>
+</p:sld>
+</file>
+
+<file path=ppt/slides/slide5.xml><?xml version="1.0" encoding="utf-8"?>
+<p:sld xmlns:a="http://schemas.openxmlformats.org/drawingml/2006/main" xmlns:r="http://schemas.openxmlformats.org/officeDocument/2006/relationships" xmlns:p="http://schemas.openxmlformats.org/presentationml/2006/main">
+  <p:cSld name="Slide 5">
+    <p:spTree>
+      <p:nvGrpSpPr>
+        <p:cNvPr id="1" name=""/>
+        <p:cNvGrpSpPr/>
+        <p:nvPr/>
+      </p:nvGrpSpPr>
+      <p:grpSpPr>
+        <a:xfrm>
+          <a:off x="0" y="0"/>
+          <a:ext cx="0" cy="0"/>
+          <a:chOff x="0" y="0"/>
+          <a:chExt cx="0" cy="0"/>
+        </a:xfrm>
+      </p:grpSpPr>
+      <p:sp>
+        <p:nvSpPr>
+          <p:cNvPr id="2" name="Text 0"/>
+          <p:cNvSpPr/>
+          <p:nvPr/>
+        </p:nvSpPr>
+        <p:spPr>
+          <a:xfrm>
+            <a:off x="457200" y="713232"/>
+            <a:ext cx="11368735" cy="274320"/>
+          </a:xfrm>
+          <a:prstGeom prst="rect">
+            <a:avLst/>
+          </a:prstGeom>
+          <a:noFill/>
+          <a:ln/>
+        </p:spPr>
+        <p:txBody>
+          <a:bodyPr wrap="square" lIns="0" tIns="0" rIns="0" bIns="0" rtlCol="0" anchor="ctr"/>
+          <a:lstStyle/>
+          <a:p>
+            <a:pPr algn="r" indent="0" marL="0">
+              <a:buNone/>
+            </a:pPr>
+            <a:r>
+              <a:rPr lang="en-US" sz="1400" b="1" dirty="0">
+                <a:solidFill>
+                  <a:srgbClr val="1C3F6E"/>
+                </a:solidFill>
+                <a:latin typeface="Calibri" pitchFamily="34" charset="0"/>
+                <a:ea typeface="Calibri" pitchFamily="34" charset="-122"/>
+                <a:cs typeface="Calibri" pitchFamily="34" charset="-120"/>
+              </a:rPr>
+              <a:t>HOMEWORK CORRECTION</a:t>
+            </a:r>
+            <a:endParaRPr lang="en-US" sz="1400" dirty="0"/>
+          </a:p>
+        </p:txBody>
+      </p:sp>
+      <p:pic>
+        <p:nvPicPr>
+          <p:cNvPr id="3" name="Image 0" descr="/home/claude/f4/img/minesec_sheet.png">    </p:cNvPr>
+          <p:cNvPicPr>
+            <a:picLocks noChangeAspect="1"/>
+          </p:cNvPicPr>
+          <p:nvPr/>
+        </p:nvPicPr>
+        <p:blipFill>
+          <a:blip r:embed="rId1"/>
+          <a:stretch>
+            <a:fillRect/>
+          </a:stretch>
+        </p:blipFill>
+        <p:spPr>
+          <a:xfrm>
+            <a:off x="0" y="658368"/>
+            <a:ext cx="5120640" cy="5833872"/>
+          </a:xfrm>
+          <a:prstGeom prst="rect">
+            <a:avLst/>
+          </a:prstGeom>
+        </p:spPr>
+      </p:pic>
+      <p:sp>
+        <p:nvSpPr>
+          <p:cNvPr id="4" name="Text 1"/>
+          <p:cNvSpPr/>
+          <p:nvPr/>
+        </p:nvSpPr>
+        <p:spPr>
+          <a:xfrm>
+            <a:off x="5349240" y="1005840"/>
+            <a:ext cx="6522415" cy="731520"/>
+          </a:xfrm>
+          <a:prstGeom prst="rect">
+            <a:avLst/>
+          </a:prstGeom>
+          <a:noFill/>
+          <a:ln/>
+        </p:spPr>
+        <p:txBody>
+          <a:bodyPr wrap="square" lIns="0" tIns="0" rIns="0" bIns="0" rtlCol="0" anchor="ctr">
+            <a:normAutofit/>
+          </a:bodyPr>
+          <a:lstStyle/>
+          <a:p>
+            <a:pPr algn="ctr" indent="0" marL="0">
+              <a:buNone/>
+            </a:pPr>
+            <a:r>
+              <a:rPr lang="en-US" sz="3600" b="1" dirty="0">
+                <a:solidFill>
+                  <a:srgbClr val="990011"/>
+                </a:solidFill>
+                <a:latin typeface="Times New Roman" pitchFamily="34" charset="0"/>
+                <a:ea typeface="Times New Roman" pitchFamily="34" charset="-122"/>
+                <a:cs typeface="Times New Roman" pitchFamily="34" charset="-120"/>
+              </a:rPr>
+              <a:t>Correction: Possible Answer</a:t>
+            </a:r>
+            <a:endParaRPr lang="en-US" sz="3600" dirty="0"/>
+          </a:p>
+        </p:txBody>
+      </p:sp>
+      <p:sp>
+        <p:nvSpPr>
+          <p:cNvPr id="5" name="Text 2"/>
+          <p:cNvSpPr/>
+          <p:nvPr/>
+        </p:nvSpPr>
+        <p:spPr>
+          <a:xfrm>
+            <a:off x="5349240" y="1783080"/>
+            <a:ext cx="6522415" cy="4663440"/>
+          </a:xfrm>
+          <a:prstGeom prst="rect">
+            <a:avLst/>
+          </a:prstGeom>
+          <a:noFill/>
+          <a:ln/>
+        </p:spPr>
+        <p:txBody>
+          <a:bodyPr wrap="square" lIns="0" tIns="0" rIns="0" bIns="0" rtlCol="0" anchor="t"/>
+          <a:lstStyle/>
+          <a:p>
+            <a:pPr algn="l" indent="0" marL="0">
+              <a:spcAft>
+                <a:spcPts val="800"/>
+              </a:spcAft>
+              <a:buNone/>
+            </a:pPr>
+            <a:r>
+              <a:rPr lang="en-US" sz="4000" dirty="0">
+                <a:solidFill>
+                  <a:srgbClr val="111111"/>
+                </a:solidFill>
+                <a:latin typeface="Times New Roman" pitchFamily="34" charset="0"/>
+                <a:ea typeface="Times New Roman" pitchFamily="34" charset="-122"/>
+                <a:cs typeface="Times New Roman" pitchFamily="34" charset="-120"/>
+              </a:rPr>
+              <a:t>Wooden furniture, firewood or charcoal, honey, bush mango or njangsa, and traditional medicines.</a:t>
+            </a:r>
+            <a:endParaRPr lang="en-US" sz="4000" dirty="0"/>
+          </a:p>
+        </p:txBody>
+      </p:sp>
+      <p:sp>
+        <p:nvSpPr>
+          <p:cNvPr id="25" name="Slide Number Placeholder 0"/>
+          <p:cNvSpPr>
+            <a:spLocks noGrp="1"/>
+          </p:cNvSpPr>
+          <p:nvPr>
+            <p:ph type="sldNum" sz="quarter" idx="4294967295"/>
+          </p:nvPr>
+        </p:nvSpPr>
+        <p:spPr>
+          <a:xfrm>
+            <a:off x="27432" y="91440"/>
+            <a:ext cx="585216" cy="475488"/>
+          </a:xfrm>
+          <a:prstGeom prst="rect">
+            <a:avLst/>
+          </a:prstGeom>
+          <a:extLst>
+            <a:ext uri="{C572A759-6A51-4108-AA02-DFA0A04FC94B}">
+              <ma14:wrappingTextBoxFlag xmlns:ma14="http://schemas.microsoft.com/office/mac/drawingml/2011/main" val="0"/>
+            </a:ext>
+          </a:extLst>
+        </p:spPr>
+        <p:txBody>
+          <a:bodyPr/>
+          <a:lstStyle>
+            <a:lvl1pPr>
+              <a:defRPr sz="2000">
+                <a:solidFill>
+                  <a:srgbClr val="FFFFFF"/>
+                </a:solidFill>
+                <a:latin typeface="Calibri"/>
+                <a:ea typeface="Calibri"/>
+                <a:cs typeface="Calibri"/>
+              </a:defRPr>
+            </a:lvl1pPr>
+          </a:lstStyle>
+          <a:p>
+            <a:pPr algn="ctr"/>
+            <a:fld id="{F7021451-1387-4CA6-816F-3879F97B5CBC}" type="slidenum">
+              <a:rPr b="1" lang="en-US"/>
+              <a:t>5</a:t>
+            </a:fld>
+            <a:endParaRPr lang="en-US"/>
+          </a:p>
+        </p:txBody>
+      </p:sp>
+    </p:spTree>
+  </p:cSld>
+  <p:clrMapOvr>
+    <a:masterClrMapping/>
+  </p:clrMapOvr>
+</p:sld>
+</file>
+
+<file path=ppt/slides/slide50.xml><?xml version="1.0" encoding="utf-8"?>
+<p:sld xmlns:a="http://schemas.openxmlformats.org/drawingml/2006/main" xmlns:r="http://schemas.openxmlformats.org/officeDocument/2006/relationships" xmlns:p="http://schemas.openxmlformats.org/presentationml/2006/main">
+  <p:cSld name="Slide 50">
+    <p:spTree>
+      <p:nvGrpSpPr>
+        <p:cNvPr id="1" name=""/>
+        <p:cNvGrpSpPr/>
+        <p:nvPr/>
+      </p:nvGrpSpPr>
+      <p:grpSpPr>
+        <a:xfrm>
+          <a:off x="0" y="0"/>
+          <a:ext cx="0" cy="0"/>
+          <a:chOff x="0" y="0"/>
+          <a:chExt cx="0" cy="0"/>
+        </a:xfrm>
+      </p:grpSpPr>
+      <p:sp>
+        <p:nvSpPr>
+          <p:cNvPr id="2" name="Text 0"/>
+          <p:cNvSpPr/>
+          <p:nvPr/>
+        </p:nvSpPr>
+        <p:spPr>
+          <a:xfrm>
+            <a:off x="457200" y="713232"/>
+            <a:ext cx="11368735" cy="274320"/>
+          </a:xfrm>
+          <a:prstGeom prst="rect">
+            <a:avLst/>
+          </a:prstGeom>
+          <a:noFill/>
+          <a:ln/>
+        </p:spPr>
+        <p:txBody>
+          <a:bodyPr wrap="square" lIns="0" tIns="0" rIns="0" bIns="0" rtlCol="0" anchor="ctr"/>
+          <a:lstStyle/>
+          <a:p>
+            <a:pPr algn="r" indent="0" marL="0">
+              <a:buNone/>
+            </a:pPr>
+            <a:r>
+              <a:rPr lang="en-US" sz="1400" b="1" dirty="0">
+                <a:solidFill>
+                  <a:srgbClr val="1C3F6E"/>
+                </a:solidFill>
+                <a:latin typeface="Calibri" pitchFamily="34" charset="0"/>
+                <a:ea typeface="Calibri" pitchFamily="34" charset="-122"/>
+                <a:cs typeface="Calibri" pitchFamily="34" charset="-120"/>
+              </a:rPr>
+              <a:t>REMEDIATION</a:t>
+            </a:r>
+            <a:endParaRPr lang="en-US" sz="1400" dirty="0"/>
+          </a:p>
+        </p:txBody>
+      </p:sp>
+      <p:pic>
+        <p:nvPicPr>
+          <p:cNvPr id="3" name="Image 0" descr="/home/claude/f4/img/minesec_sheet.png">    </p:cNvPr>
+          <p:cNvPicPr>
+            <a:picLocks noChangeAspect="1"/>
+          </p:cNvPicPr>
+          <p:nvPr/>
+        </p:nvPicPr>
+        <p:blipFill>
+          <a:blip r:embed="rId1"/>
+          <a:stretch>
+            <a:fillRect/>
+          </a:stretch>
+        </p:blipFill>
+        <p:spPr>
+          <a:xfrm>
+            <a:off x="0" y="658368"/>
+            <a:ext cx="5120640" cy="5833872"/>
+          </a:xfrm>
+          <a:prstGeom prst="rect">
+            <a:avLst/>
+          </a:prstGeom>
+        </p:spPr>
+      </p:pic>
+      <p:sp>
+        <p:nvSpPr>
+          <p:cNvPr id="4" name="Text 1"/>
+          <p:cNvSpPr/>
+          <p:nvPr/>
+        </p:nvSpPr>
+        <p:spPr>
+          <a:xfrm>
+            <a:off x="5349240" y="1005840"/>
+            <a:ext cx="6522415" cy="731520"/>
+          </a:xfrm>
+          <a:prstGeom prst="rect">
+            <a:avLst/>
+          </a:prstGeom>
+          <a:noFill/>
+          <a:ln/>
+        </p:spPr>
+        <p:txBody>
+          <a:bodyPr wrap="square" lIns="0" tIns="0" rIns="0" bIns="0" rtlCol="0" anchor="ctr">
+            <a:normAutofit/>
+          </a:bodyPr>
+          <a:lstStyle/>
+          <a:p>
+            <a:pPr algn="ctr" indent="0" marL="0">
+              <a:buNone/>
+            </a:pPr>
+            <a:r>
+              <a:rPr lang="en-US" sz="3600" b="1" dirty="0">
+                <a:solidFill>
+                  <a:srgbClr val="990011"/>
+                </a:solidFill>
+                <a:latin typeface="Times New Roman" pitchFamily="34" charset="0"/>
+                <a:ea typeface="Times New Roman" pitchFamily="34" charset="-122"/>
+                <a:cs typeface="Times New Roman" pitchFamily="34" charset="-120"/>
+              </a:rPr>
+              <a:t>Remediation (continued)</a:t>
+            </a:r>
+            <a:endParaRPr lang="en-US" sz="3600" dirty="0"/>
+          </a:p>
+        </p:txBody>
+      </p:sp>
+      <p:sp>
+        <p:nvSpPr>
+          <p:cNvPr id="5" name="Text 2"/>
+          <p:cNvSpPr/>
+          <p:nvPr/>
+        </p:nvSpPr>
+        <p:spPr>
+          <a:xfrm>
+            <a:off x="5349240" y="1783080"/>
+            <a:ext cx="6522415" cy="4663440"/>
+          </a:xfrm>
+          <a:prstGeom prst="rect">
+            <a:avLst/>
+          </a:prstGeom>
+          <a:noFill/>
+          <a:ln/>
+        </p:spPr>
+        <p:txBody>
+          <a:bodyPr wrap="square" lIns="0" tIns="0" rIns="0" bIns="0" rtlCol="0" anchor="t"/>
+          <a:lstStyle/>
+          <a:p>
+            <a:pPr algn="l" marL="342900" indent="-342900">
+              <a:spcAft>
+                <a:spcPts val="800"/>
+              </a:spcAft>
+              <a:buSzPct val="100000"/>
+              <a:buFont typeface="+mj-lt"/>
+              <a:buAutoNum type="arabicPeriod" startAt="1"/>
+            </a:pPr>
+            <a:r>
+              <a:rPr lang="en-US" sz="4000" dirty="0">
+                <a:solidFill>
+                  <a:srgbClr val="111111"/>
+                </a:solidFill>
+                <a:latin typeface="Times New Roman" pitchFamily="34" charset="0"/>
+                <a:ea typeface="Times New Roman" pitchFamily="34" charset="-122"/>
+                <a:cs typeface="Times New Roman" pitchFamily="34" charset="-120"/>
+              </a:rPr>
+              <a:t>Logs are exported through the port of ______.</a:t>
+            </a:r>
+            <a:endParaRPr lang="en-US" sz="4000" dirty="0"/>
+          </a:p>
+        </p:txBody>
+      </p:sp>
+      <p:sp>
+        <p:nvSpPr>
+          <p:cNvPr id="25" name="Slide Number Placeholder 0"/>
+          <p:cNvSpPr>
+            <a:spLocks noGrp="1"/>
+          </p:cNvSpPr>
+          <p:nvPr>
+            <p:ph type="sldNum" sz="quarter" idx="4294967295"/>
+          </p:nvPr>
+        </p:nvSpPr>
+        <p:spPr>
+          <a:xfrm>
+            <a:off x="27432" y="91440"/>
+            <a:ext cx="585216" cy="475488"/>
+          </a:xfrm>
+          <a:prstGeom prst="rect">
+            <a:avLst/>
+          </a:prstGeom>
+          <a:extLst>
+            <a:ext uri="{C572A759-6A51-4108-AA02-DFA0A04FC94B}">
+              <ma14:wrappingTextBoxFlag xmlns:ma14="http://schemas.microsoft.com/office/mac/drawingml/2011/main" val="0"/>
+            </a:ext>
+          </a:extLst>
+        </p:spPr>
+        <p:txBody>
+          <a:bodyPr/>
+          <a:lstStyle>
+            <a:lvl1pPr>
+              <a:defRPr sz="2000">
+                <a:solidFill>
+                  <a:srgbClr val="FFFFFF"/>
+                </a:solidFill>
+                <a:latin typeface="Calibri"/>
+                <a:ea typeface="Calibri"/>
+                <a:cs typeface="Calibri"/>
+              </a:defRPr>
+            </a:lvl1pPr>
+          </a:lstStyle>
+          <a:p>
+            <a:pPr algn="ctr"/>
+            <a:fld id="{F7021451-1387-4CA6-816F-3879F97B5CBC}" type="slidenum">
+              <a:rPr b="1" lang="en-US"/>
+              <a:t>50</a:t>
+            </a:fld>
+            <a:endParaRPr lang="en-US"/>
+          </a:p>
+        </p:txBody>
+      </p:sp>
+    </p:spTree>
+  </p:cSld>
+  <p:clrMapOvr>
+    <a:masterClrMapping/>
+  </p:clrMapOvr>
+</p:sld>
+</file>
+
+<file path=ppt/slides/slide51.xml><?xml version="1.0" encoding="utf-8"?>
+<p:sld xmlns:a="http://schemas.openxmlformats.org/drawingml/2006/main" xmlns:r="http://schemas.openxmlformats.org/officeDocument/2006/relationships" xmlns:p="http://schemas.openxmlformats.org/presentationml/2006/main">
+  <p:cSld name="Slide 51">
+    <p:spTree>
+      <p:nvGrpSpPr>
+        <p:cNvPr id="1" name=""/>
+        <p:cNvGrpSpPr/>
+        <p:nvPr/>
+      </p:nvGrpSpPr>
+      <p:grpSpPr>
+        <a:xfrm>
+          <a:off x="0" y="0"/>
+          <a:ext cx="0" cy="0"/>
+          <a:chOff x="0" y="0"/>
+          <a:chExt cx="0" cy="0"/>
+        </a:xfrm>
+      </p:grpSpPr>
+      <p:sp>
+        <p:nvSpPr>
+          <p:cNvPr id="2" name="Text 0"/>
+          <p:cNvSpPr/>
+          <p:nvPr/>
+        </p:nvSpPr>
+        <p:spPr>
+          <a:xfrm>
+            <a:off x="457200" y="713232"/>
+            <a:ext cx="11368735" cy="274320"/>
+          </a:xfrm>
+          <a:prstGeom prst="rect">
+            <a:avLst/>
+          </a:prstGeom>
+          <a:noFill/>
+          <a:ln/>
+        </p:spPr>
+        <p:txBody>
+          <a:bodyPr wrap="square" lIns="0" tIns="0" rIns="0" bIns="0" rtlCol="0" anchor="ctr"/>
+          <a:lstStyle/>
+          <a:p>
+            <a:pPr algn="r" indent="0" marL="0">
+              <a:buNone/>
+            </a:pPr>
+            <a:r>
+              <a:rPr lang="en-US" sz="1400" b="1" dirty="0">
+                <a:solidFill>
+                  <a:srgbClr val="1C3F6E"/>
+                </a:solidFill>
+                <a:latin typeface="Calibri" pitchFamily="34" charset="0"/>
+                <a:ea typeface="Calibri" pitchFamily="34" charset="-122"/>
+                <a:cs typeface="Calibri" pitchFamily="34" charset="-120"/>
+              </a:rPr>
+              <a:t>HOMEWORK</a:t>
+            </a:r>
+            <a:endParaRPr lang="en-US" sz="1400" dirty="0"/>
+          </a:p>
+        </p:txBody>
+      </p:sp>
+      <p:pic>
+        <p:nvPicPr>
+          <p:cNvPr id="3" name="Image 0" descr="/home/claude/f4/img/minesec_sheet.png">    </p:cNvPr>
+          <p:cNvPicPr>
+            <a:picLocks noChangeAspect="1"/>
+          </p:cNvPicPr>
+          <p:nvPr/>
+        </p:nvPicPr>
+        <p:blipFill>
+          <a:blip r:embed="rId1"/>
+          <a:stretch>
+            <a:fillRect/>
+          </a:stretch>
+        </p:blipFill>
+        <p:spPr>
+          <a:xfrm>
+            <a:off x="0" y="658368"/>
+            <a:ext cx="5120640" cy="5833872"/>
+          </a:xfrm>
+          <a:prstGeom prst="rect">
+            <a:avLst/>
+          </a:prstGeom>
+        </p:spPr>
+      </p:pic>
+      <p:sp>
+        <p:nvSpPr>
+          <p:cNvPr id="4" name="Text 1"/>
+          <p:cNvSpPr/>
+          <p:nvPr/>
+        </p:nvSpPr>
+        <p:spPr>
+          <a:xfrm>
+            <a:off x="5349240" y="1005840"/>
+            <a:ext cx="6522415" cy="731520"/>
+          </a:xfrm>
+          <a:prstGeom prst="rect">
+            <a:avLst/>
+          </a:prstGeom>
+          <a:noFill/>
+          <a:ln/>
+        </p:spPr>
+        <p:txBody>
+          <a:bodyPr wrap="square" lIns="0" tIns="0" rIns="0" bIns="0" rtlCol="0" anchor="ctr">
+            <a:normAutofit/>
+          </a:bodyPr>
+          <a:lstStyle/>
+          <a:p>
+            <a:pPr algn="ctr" indent="0" marL="0">
+              <a:buNone/>
+            </a:pPr>
+            <a:r>
+              <a:rPr lang="en-US" sz="3600" b="1" dirty="0">
+                <a:solidFill>
+                  <a:srgbClr val="990011"/>
+                </a:solidFill>
+                <a:latin typeface="Times New Roman" pitchFamily="34" charset="0"/>
+                <a:ea typeface="Times New Roman" pitchFamily="34" charset="-122"/>
+                <a:cs typeface="Times New Roman" pitchFamily="34" charset="-120"/>
+              </a:rPr>
+              <a:t>Homework</a:t>
+            </a:r>
+            <a:endParaRPr lang="en-US" sz="3600" dirty="0"/>
+          </a:p>
+        </p:txBody>
+      </p:sp>
+      <p:sp>
+        <p:nvSpPr>
+          <p:cNvPr id="5" name="Text 2"/>
+          <p:cNvSpPr/>
+          <p:nvPr/>
+        </p:nvSpPr>
+        <p:spPr>
+          <a:xfrm>
+            <a:off x="5349240" y="1783080"/>
+            <a:ext cx="6522415" cy="4663440"/>
+          </a:xfrm>
+          <a:prstGeom prst="rect">
+            <a:avLst/>
+          </a:prstGeom>
+          <a:noFill/>
+          <a:ln/>
+        </p:spPr>
+        <p:txBody>
+          <a:bodyPr wrap="square" lIns="0" tIns="0" rIns="0" bIns="0" rtlCol="0" anchor="t"/>
+          <a:lstStyle/>
+          <a:p>
+            <a:pPr algn="l" indent="0" marL="0">
+              <a:spcAft>
+                <a:spcPts val="800"/>
+              </a:spcAft>
+              <a:buNone/>
+            </a:pPr>
+            <a:r>
+              <a:rPr lang="en-US" sz="4000" dirty="0">
+                <a:solidFill>
+                  <a:srgbClr val="111111"/>
+                </a:solidFill>
+                <a:latin typeface="Times New Roman" pitchFamily="34" charset="0"/>
+                <a:ea typeface="Times New Roman" pitchFamily="34" charset="-122"/>
+                <a:cs typeface="Times New Roman" pitchFamily="34" charset="-120"/>
+              </a:rPr>
+              <a:t>Name three valuable trees of the forests of Cameroon and one use of each.</a:t>
+            </a:r>
+            <a:endParaRPr lang="en-US" sz="4000" dirty="0"/>
+          </a:p>
+        </p:txBody>
+      </p:sp>
+      <p:sp>
+        <p:nvSpPr>
+          <p:cNvPr id="25" name="Slide Number Placeholder 0"/>
+          <p:cNvSpPr>
+            <a:spLocks noGrp="1"/>
+          </p:cNvSpPr>
+          <p:nvPr>
+            <p:ph type="sldNum" sz="quarter" idx="4294967295"/>
+          </p:nvPr>
+        </p:nvSpPr>
+        <p:spPr>
+          <a:xfrm>
+            <a:off x="27432" y="91440"/>
+            <a:ext cx="585216" cy="475488"/>
+          </a:xfrm>
+          <a:prstGeom prst="rect">
+            <a:avLst/>
+          </a:prstGeom>
+          <a:extLst>
+            <a:ext uri="{C572A759-6A51-4108-AA02-DFA0A04FC94B}">
+              <ma14:wrappingTextBoxFlag xmlns:ma14="http://schemas.microsoft.com/office/mac/drawingml/2011/main" val="0"/>
+            </a:ext>
+          </a:extLst>
+        </p:spPr>
+        <p:txBody>
+          <a:bodyPr/>
+          <a:lstStyle>
+            <a:lvl1pPr>
+              <a:defRPr sz="2000">
+                <a:solidFill>
+                  <a:srgbClr val="FFFFFF"/>
+                </a:solidFill>
+                <a:latin typeface="Calibri"/>
+                <a:ea typeface="Calibri"/>
+                <a:cs typeface="Calibri"/>
+              </a:defRPr>
+            </a:lvl1pPr>
+          </a:lstStyle>
+          <a:p>
+            <a:pPr algn="ctr"/>
+            <a:fld id="{F7021451-1387-4CA6-816F-3879F97B5CBC}" type="slidenum">
+              <a:rPr b="1" lang="en-US"/>
+              <a:t>51</a:t>
+            </a:fld>
+            <a:endParaRPr lang="en-US"/>
+          </a:p>
+        </p:txBody>
+      </p:sp>
+    </p:spTree>
+  </p:cSld>
+  <p:clrMapOvr>
+    <a:masterClrMapping/>
+  </p:clrMapOvr>
+</p:sld>
+</file>
+
+<file path=ppt/slides/slide52.xml><?xml version="1.0" encoding="utf-8"?>
+<p:sld xmlns:a="http://schemas.openxmlformats.org/drawingml/2006/main" xmlns:r="http://schemas.openxmlformats.org/officeDocument/2006/relationships" xmlns:p="http://schemas.openxmlformats.org/presentationml/2006/main">
+  <p:cSld name="Slide 52">
+    <p:spTree>
+      <p:nvGrpSpPr>
+        <p:cNvPr id="1" name=""/>
+        <p:cNvGrpSpPr/>
+        <p:nvPr/>
+      </p:nvGrpSpPr>
+      <p:grpSpPr>
+        <a:xfrm>
+          <a:off x="0" y="0"/>
+          <a:ext cx="0" cy="0"/>
+          <a:chOff x="0" y="0"/>
+          <a:chExt cx="0" cy="0"/>
+        </a:xfrm>
+      </p:grpSpPr>
+      <p:sp>
+        <p:nvSpPr>
+          <p:cNvPr id="2" name="Text 0"/>
+          <p:cNvSpPr/>
+          <p:nvPr/>
+        </p:nvSpPr>
+        <p:spPr>
+          <a:xfrm>
+            <a:off x="457200" y="713232"/>
+            <a:ext cx="11368735" cy="274320"/>
+          </a:xfrm>
+          <a:prstGeom prst="rect">
+            <a:avLst/>
+          </a:prstGeom>
+          <a:noFill/>
+          <a:ln/>
+        </p:spPr>
+        <p:txBody>
+          <a:bodyPr wrap="square" lIns="0" tIns="0" rIns="0" bIns="0" rtlCol="0" anchor="ctr"/>
+          <a:lstStyle/>
+          <a:p>
+            <a:pPr algn="r" indent="0" marL="0">
+              <a:buNone/>
+            </a:pPr>
+            <a:r>
+              <a:rPr lang="en-US" sz="1400" b="1" dirty="0">
+                <a:solidFill>
+                  <a:srgbClr val="1C3F6E"/>
+                </a:solidFill>
+                <a:latin typeface="Calibri" pitchFamily="34" charset="0"/>
+                <a:ea typeface="Calibri" pitchFamily="34" charset="-122"/>
+                <a:cs typeface="Calibri" pitchFamily="34" charset="-120"/>
+              </a:rPr>
+              <a:t>NEXT LESSON</a:t>
+            </a:r>
+            <a:endParaRPr lang="en-US" sz="1400" dirty="0"/>
+          </a:p>
+        </p:txBody>
+      </p:sp>
+      <p:pic>
+        <p:nvPicPr>
+          <p:cNvPr id="3" name="Image 0" descr="/home/claude/f4/img/minesec_sheet.png">    </p:cNvPr>
+          <p:cNvPicPr>
+            <a:picLocks noChangeAspect="1"/>
+          </p:cNvPicPr>
+          <p:nvPr/>
+        </p:nvPicPr>
+        <p:blipFill>
+          <a:blip r:embed="rId1"/>
+          <a:stretch>
+            <a:fillRect/>
+          </a:stretch>
+        </p:blipFill>
+        <p:spPr>
+          <a:xfrm>
+            <a:off x="0" y="658368"/>
+            <a:ext cx="5120640" cy="5833872"/>
+          </a:xfrm>
+          <a:prstGeom prst="rect">
+            <a:avLst/>
+          </a:prstGeom>
+        </p:spPr>
+      </p:pic>
+      <p:sp>
+        <p:nvSpPr>
+          <p:cNvPr id="4" name="Text 1"/>
+          <p:cNvSpPr/>
+          <p:nvPr/>
+        </p:nvSpPr>
+        <p:spPr>
+          <a:xfrm>
+            <a:off x="5349240" y="1005840"/>
+            <a:ext cx="6522415" cy="731520"/>
+          </a:xfrm>
+          <a:prstGeom prst="rect">
+            <a:avLst/>
+          </a:prstGeom>
+          <a:noFill/>
+          <a:ln/>
+        </p:spPr>
+        <p:txBody>
+          <a:bodyPr wrap="square" lIns="0" tIns="0" rIns="0" bIns="0" rtlCol="0" anchor="ctr">
+            <a:normAutofit/>
+          </a:bodyPr>
+          <a:lstStyle/>
+          <a:p>
+            <a:pPr algn="ctr" indent="0" marL="0">
+              <a:buNone/>
+            </a:pPr>
+            <a:r>
+              <a:rPr lang="en-US" sz="3600" b="1" dirty="0">
+                <a:solidFill>
+                  <a:srgbClr val="990011"/>
+                </a:solidFill>
+                <a:latin typeface="Times New Roman" pitchFamily="34" charset="0"/>
+                <a:ea typeface="Times New Roman" pitchFamily="34" charset="-122"/>
+                <a:cs typeface="Times New Roman" pitchFamily="34" charset="-120"/>
+              </a:rPr>
+              <a:t>Next Lesson</a:t>
+            </a:r>
+            <a:endParaRPr lang="en-US" sz="3600" dirty="0"/>
+          </a:p>
+        </p:txBody>
+      </p:sp>
+      <p:sp>
+        <p:nvSpPr>
+          <p:cNvPr id="5" name="Text 2"/>
+          <p:cNvSpPr/>
+          <p:nvPr/>
+        </p:nvSpPr>
+        <p:spPr>
+          <a:xfrm>
+            <a:off x="5349240" y="1783080"/>
+            <a:ext cx="6522415" cy="4663440"/>
+          </a:xfrm>
+          <a:prstGeom prst="rect">
+            <a:avLst/>
+          </a:prstGeom>
+          <a:noFill/>
+          <a:ln/>
+        </p:spPr>
+        <p:txBody>
+          <a:bodyPr wrap="square" lIns="0" tIns="0" rIns="0" bIns="0" rtlCol="0" anchor="ctr"/>
+          <a:lstStyle/>
+          <a:p>
+            <a:pPr algn="ctr" indent="0" marL="0">
+              <a:spcAft>
+                <a:spcPts val="800"/>
+              </a:spcAft>
+              <a:buNone/>
+            </a:pPr>
+            <a:r>
+              <a:rPr lang="en-US" sz="4000" b="1" dirty="0">
+                <a:solidFill>
+                  <a:srgbClr val="111111"/>
+                </a:solidFill>
+                <a:latin typeface="Times New Roman" pitchFamily="34" charset="0"/>
+                <a:ea typeface="Times New Roman" pitchFamily="34" charset="-122"/>
+                <a:cs typeface="Times New Roman" pitchFamily="34" charset="-120"/>
+              </a:rPr>
+              <a:t>Our next lesson will be on:</a:t>
+            </a:r>
+            <a:endParaRPr lang="en-US" sz="4000" dirty="0"/>
+          </a:p>
+          <a:p>
+            <a:pPr algn="ctr" indent="0" marL="0">
+              <a:spcAft>
+                <a:spcPts val="800"/>
+              </a:spcAft>
+              <a:buNone/>
+            </a:pPr>
+            <a:r>
+              <a:rPr lang="en-US" sz="4000" b="1" dirty="0">
+                <a:solidFill>
+                  <a:srgbClr val="990011"/>
+                </a:solidFill>
+                <a:latin typeface="Times New Roman" pitchFamily="34" charset="0"/>
+                <a:ea typeface="Times New Roman" pitchFamily="34" charset="-122"/>
+                <a:cs typeface="Times New Roman" pitchFamily="34" charset="-120"/>
+              </a:rPr>
+              <a:t>Further Study 2: Deforestation in Cameroon and its Consequences</a:t>
+            </a:r>
+            <a:endParaRPr lang="en-US" sz="4000" dirty="0"/>
+          </a:p>
+        </p:txBody>
+      </p:sp>
+      <p:sp>
+        <p:nvSpPr>
+          <p:cNvPr id="25" name="Slide Number Placeholder 0"/>
+          <p:cNvSpPr>
+            <a:spLocks noGrp="1"/>
+          </p:cNvSpPr>
+          <p:nvPr>
+            <p:ph type="sldNum" sz="quarter" idx="4294967295"/>
+          </p:nvPr>
+        </p:nvSpPr>
+        <p:spPr>
+          <a:xfrm>
+            <a:off x="27432" y="91440"/>
+            <a:ext cx="585216" cy="475488"/>
+          </a:xfrm>
+          <a:prstGeom prst="rect">
+            <a:avLst/>
+          </a:prstGeom>
+          <a:extLst>
+            <a:ext uri="{C572A759-6A51-4108-AA02-DFA0A04FC94B}">
+              <ma14:wrappingTextBoxFlag xmlns:ma14="http://schemas.microsoft.com/office/mac/drawingml/2011/main" val="0"/>
+            </a:ext>
+          </a:extLst>
+        </p:spPr>
+        <p:txBody>
+          <a:bodyPr/>
+          <a:lstStyle>
+            <a:lvl1pPr>
+              <a:defRPr sz="2000">
+                <a:solidFill>
+                  <a:srgbClr val="FFFFFF"/>
+                </a:solidFill>
+                <a:latin typeface="Calibri"/>
+                <a:ea typeface="Calibri"/>
+                <a:cs typeface="Calibri"/>
+              </a:defRPr>
+            </a:lvl1pPr>
+          </a:lstStyle>
+          <a:p>
+            <a:pPr algn="ctr"/>
+            <a:fld id="{F7021451-1387-4CA6-816F-3879F97B5CBC}" type="slidenum">
+              <a:rPr b="1" lang="en-US"/>
+              <a:t>52</a:t>
+            </a:fld>
+            <a:endParaRPr lang="en-US"/>
+          </a:p>
+        </p:txBody>
+      </p:sp>
+    </p:spTree>
+  </p:cSld>
+  <p:clrMapOvr>
+    <a:masterClrMapping/>
+  </p:clrMapOvr>
+</p:sld>
+</file>
+
+<file path=ppt/slides/slide53.xml><?xml version="1.0" encoding="utf-8"?>
+<p:sld xmlns:a="http://schemas.openxmlformats.org/drawingml/2006/main" xmlns:r="http://schemas.openxmlformats.org/officeDocument/2006/relationships" xmlns:p="http://schemas.openxmlformats.org/presentationml/2006/main">
+  <p:cSld name="Slide 53">
+    <p:spTree>
+      <p:nvGrpSpPr>
+        <p:cNvPr id="1" name=""/>
+        <p:cNvGrpSpPr/>
+        <p:nvPr/>
+      </p:nvGrpSpPr>
+      <p:grpSpPr>
+        <a:xfrm>
+          <a:off x="0" y="0"/>
+          <a:ext cx="0" cy="0"/>
+          <a:chOff x="0" y="0"/>
+          <a:chExt cx="0" cy="0"/>
+        </a:xfrm>
+      </p:grpSpPr>
+      <p:sp>
+        <p:nvSpPr>
+          <p:cNvPr id="2" name="Text 0"/>
+          <p:cNvSpPr/>
+          <p:nvPr/>
+        </p:nvSpPr>
+        <p:spPr>
+          <a:xfrm>
+            <a:off x="457200" y="713232"/>
+            <a:ext cx="11368735" cy="274320"/>
+          </a:xfrm>
+          <a:prstGeom prst="rect">
+            <a:avLst/>
+          </a:prstGeom>
+          <a:noFill/>
+          <a:ln/>
+        </p:spPr>
+        <p:txBody>
+          <a:bodyPr wrap="square" lIns="0" tIns="0" rIns="0" bIns="0" rtlCol="0" anchor="ctr"/>
+          <a:lstStyle/>
+          <a:p>
+            <a:pPr algn="r" indent="0" marL="0">
+              <a:buNone/>
+            </a:pPr>
+            <a:r>
+              <a:rPr lang="en-US" sz="1400" b="1" dirty="0">
+                <a:solidFill>
+                  <a:srgbClr val="1C3F6E"/>
+                </a:solidFill>
+                <a:latin typeface="Calibri" pitchFamily="34" charset="0"/>
+                <a:ea typeface="Calibri" pitchFamily="34" charset="-122"/>
+                <a:cs typeface="Calibri" pitchFamily="34" charset="-120"/>
+              </a:rPr>
               <a:t>BILINGUAL GAME</a:t>
             </a:r>
             <a:endParaRPr lang="en-US" sz="1400" dirty="0"/>
@@ -16563,7 +19232,7 @@
       </p:sp>
       <p:graphicFrame>
         <p:nvGraphicFramePr>
-          <p:cNvPr id="48" name="Table 0"/>
+          <p:cNvPr id="54" name="Table 0"/>
           <p:cNvGraphicFramePr>
             <a:graphicFrameLocks noGrp="1"/>
           </p:cNvGraphicFramePr>
@@ -17599,7 +20268,7 @@
             <a:pPr algn="ctr"/>
             <a:fld id="{F7021451-1387-4CA6-816F-3879F97B5CBC}" type="slidenum">
               <a:rPr b="1" lang="en-US"/>
-              <a:t>47</a:t>
+              <a:t>53</a:t>
             </a:fld>
             <a:endParaRPr lang="en-US"/>
           </a:p>
@@ -17613,9 +20282,9 @@
 </p:sld>
 </file>
 
-<file path=ppt/slides/slide48.xml><?xml version="1.0" encoding="utf-8"?>
+<file path=ppt/slides/slide54.xml><?xml version="1.0" encoding="utf-8"?>
 <p:sld xmlns:a="http://schemas.openxmlformats.org/drawingml/2006/main" xmlns:r="http://schemas.openxmlformats.org/officeDocument/2006/relationships" xmlns:p="http://schemas.openxmlformats.org/presentationml/2006/main">
-  <p:cSld name="Slide 48">
+  <p:cSld name="Slide 54">
     <p:spTree>
       <p:nvGrpSpPr>
         <p:cNvPr id="1" name=""/>
@@ -17710,7 +20379,7 @@
       </p:sp>
       <p:graphicFrame>
         <p:nvGraphicFramePr>
-          <p:cNvPr id="49" name="Table 0"/>
+          <p:cNvPr id="55" name="Table 0"/>
           <p:cNvGraphicFramePr>
             <a:graphicFrameLocks noGrp="1"/>
           </p:cNvGraphicFramePr>
@@ -18332,7 +21001,7 @@
             <a:pPr algn="ctr"/>
             <a:fld id="{F7021451-1387-4CA6-816F-3879F97B5CBC}" type="slidenum">
               <a:rPr b="1" lang="en-US"/>
-              <a:t>48</a:t>
+              <a:t>54</a:t>
             </a:fld>
             <a:endParaRPr lang="en-US"/>
           </a:p>
@@ -18346,9 +21015,9 @@
 </p:sld>
 </file>
 
-<file path=ppt/slides/slide49.xml><?xml version="1.0" encoding="utf-8"?>
+<file path=ppt/slides/slide55.xml><?xml version="1.0" encoding="utf-8"?>
 <p:sld xmlns:a="http://schemas.openxmlformats.org/drawingml/2006/main" xmlns:r="http://schemas.openxmlformats.org/officeDocument/2006/relationships" xmlns:p="http://schemas.openxmlformats.org/presentationml/2006/main">
-  <p:cSld name="Slide 49">
+  <p:cSld name="Slide 55">
     <p:spTree>
       <p:nvGrpSpPr>
         <p:cNvPr id="1" name=""/>
@@ -18443,7 +21112,7 @@
       </p:sp>
       <p:graphicFrame>
         <p:nvGraphicFramePr>
-          <p:cNvPr id="50" name="Table 0"/>
+          <p:cNvPr id="56" name="Table 0"/>
           <p:cNvGraphicFramePr>
             <a:graphicFrameLocks noGrp="1"/>
           </p:cNvGraphicFramePr>
@@ -18553,7 +21222,7 @@
                           <a:ea typeface="Calibri" pitchFamily="34" charset="-122"/>
                           <a:cs typeface="Calibri" pitchFamily="34" charset="-120"/>
                         </a:rPr>
-                        <a:t>Distribution; Methods of Exploitation and Importance; Problems and Conservation Efforts.</a:t>
+                        <a:t>Distribution; Methods of Exploitation; Importance; Problems; Conservation Efforts.</a:t>
                       </a:r>
                       <a:endParaRPr lang="en-US" sz="1600" dirty="0">
                         <a:latin typeface="Calibri" charset="0"/>
@@ -19203,7 +21872,7 @@
             <a:pPr algn="ctr"/>
             <a:fld id="{F7021451-1387-4CA6-816F-3879F97B5CBC}" type="slidenum">
               <a:rPr b="1" lang="en-US"/>
-              <a:t>49</a:t>
+              <a:t>55</a:t>
             </a:fld>
             <a:endParaRPr lang="en-US"/>
           </a:p>
@@ -19217,9 +21886,9 @@
 </p:sld>
 </file>
 
-<file path=ppt/slides/slide5.xml><?xml version="1.0" encoding="utf-8"?>
+<file path=ppt/slides/slide56.xml><?xml version="1.0" encoding="utf-8"?>
 <p:sld xmlns:a="http://schemas.openxmlformats.org/drawingml/2006/main" xmlns:r="http://schemas.openxmlformats.org/officeDocument/2006/relationships" xmlns:p="http://schemas.openxmlformats.org/presentationml/2006/main">
-  <p:cSld name="Slide 5">
+  <p:cSld name="Slide 56">
     <p:spTree>
       <p:nvGrpSpPr>
         <p:cNvPr id="1" name=""/>
@@ -19267,7 +21936,7 @@
                 <a:ea typeface="Calibri" pitchFamily="34" charset="-122"/>
                 <a:cs typeface="Calibri" pitchFamily="34" charset="-120"/>
               </a:rPr>
-              <a:t>HOMEWORK CORRECTION</a:t>
+              <a:t>TEACHER'S NOTE</a:t>
             </a:r>
             <a:endParaRPr lang="en-US" sz="1400" dirty="0"/>
           </a:p>
@@ -19332,7 +22001,7 @@
                 <a:ea typeface="Times New Roman" pitchFamily="34" charset="-122"/>
                 <a:cs typeface="Times New Roman" pitchFamily="34" charset="-120"/>
               </a:rPr>
-              <a:t>Correction: Possible Answer</a:t>
+              <a:t>Teacher's Note</a:t>
             </a:r>
             <a:endParaRPr lang="en-US" sz="3600" dirty="0"/>
           </a:p>
@@ -19359,24 +22028,130 @@
           <a:bodyPr wrap="square" lIns="0" tIns="0" rIns="0" bIns="0" rtlCol="0" anchor="t"/>
           <a:lstStyle/>
           <a:p>
-            <a:pPr algn="l" indent="0" marL="0">
+            <a:pPr algn="l" marL="342900" indent="-342900">
               <a:spcAft>
                 <a:spcPts val="800"/>
               </a:spcAft>
-              <a:buNone/>
+              <a:buSzPct val="100000"/>
+              <a:buChar char="•"/>
             </a:pPr>
             <a:r>
-              <a:rPr lang="en-US" sz="4000" dirty="0">
+              <a:rPr lang="en-US" sz="2000" dirty="0">
                 <a:solidFill>
                   <a:srgbClr val="111111"/>
                 </a:solidFill>
-                <a:latin typeface="Times New Roman" pitchFamily="34" charset="0"/>
-                <a:ea typeface="Times New Roman" pitchFamily="34" charset="-122"/>
-                <a:cs typeface="Times New Roman" pitchFamily="34" charset="-120"/>
+                <a:latin typeface="Calibri" pitchFamily="34" charset="0"/>
+                <a:ea typeface="Calibri" pitchFamily="34" charset="-122"/>
+                <a:cs typeface="Calibri" pitchFamily="34" charset="-120"/>
               </a:rPr>
-              <a:t>Wooden furniture, firewood or charcoal, honey, bush mango or njangsa, and traditional medicines.</a:t>
-            </a:r>
-            <a:endParaRPr lang="en-US" sz="4000" dirty="0"/>
+              <a:t>Timing: Homework correction, plan, objectives 8 min | Recall, situation, action 10 min | 5 activities 30 min | Board summary (copying) 30 min | Evaluation, remediation 10 min | Homework, next lesson 5 min | Logbook 7 min</a:t>
+            </a:r>
+            <a:endParaRPr lang="en-US" sz="2000" dirty="0"/>
+          </a:p>
+          <a:p>
+            <a:pPr algn="l" marL="342900" indent="-342900">
+              <a:spcAft>
+                <a:spcPts val="800"/>
+              </a:spcAft>
+              <a:buSzPct val="100000"/>
+              <a:buChar char="•"/>
+            </a:pPr>
+            <a:r>
+              <a:rPr lang="en-US" sz="2000" dirty="0">
+                <a:solidFill>
+                  <a:srgbClr val="111111"/>
+                </a:solidFill>
+                <a:latin typeface="Calibri" pitchFamily="34" charset="0"/>
+                <a:ea typeface="Calibri" pitchFamily="34" charset="-122"/>
+                <a:cs typeface="Calibri" pitchFamily="34" charset="-120"/>
+              </a:rPr>
+              <a:t>Without the projector (Activity 1): use the map.</a:t>
+            </a:r>
+            <a:endParaRPr lang="en-US" sz="2000" dirty="0"/>
+          </a:p>
+          <a:p>
+            <a:pPr algn="l" marL="342900" indent="-342900">
+              <a:spcAft>
+                <a:spcPts val="800"/>
+              </a:spcAft>
+              <a:buSzPct val="100000"/>
+              <a:buChar char="•"/>
+            </a:pPr>
+            <a:r>
+              <a:rPr lang="en-US" sz="2000" dirty="0">
+                <a:solidFill>
+                  <a:srgbClr val="111111"/>
+                </a:solidFill>
+                <a:latin typeface="Calibri" pitchFamily="34" charset="0"/>
+                <a:ea typeface="Calibri" pitchFamily="34" charset="-122"/>
+                <a:cs typeface="Calibri" pitchFamily="34" charset="-120"/>
+              </a:rPr>
+              <a:t>Without the projector (Activity 2): list the steps.</a:t>
+            </a:r>
+            <a:endParaRPr lang="en-US" sz="2000" dirty="0"/>
+          </a:p>
+          <a:p>
+            <a:pPr algn="l" marL="342900" indent="-342900">
+              <a:spcAft>
+                <a:spcPts val="800"/>
+              </a:spcAft>
+              <a:buSzPct val="100000"/>
+              <a:buChar char="•"/>
+            </a:pPr>
+            <a:r>
+              <a:rPr lang="en-US" sz="2000" dirty="0">
+                <a:solidFill>
+                  <a:srgbClr val="111111"/>
+                </a:solidFill>
+                <a:latin typeface="Calibri" pitchFamily="34" charset="0"/>
+                <a:ea typeface="Calibri" pitchFamily="34" charset="-122"/>
+                <a:cs typeface="Calibri" pitchFamily="34" charset="-120"/>
+              </a:rPr>
+              <a:t>Without the projector (Activity 3): discuss.</a:t>
+            </a:r>
+            <a:endParaRPr lang="en-US" sz="2000" dirty="0"/>
+          </a:p>
+          <a:p>
+            <a:pPr algn="l" marL="342900" indent="-342900">
+              <a:spcAft>
+                <a:spcPts val="800"/>
+              </a:spcAft>
+              <a:buSzPct val="100000"/>
+              <a:buChar char="•"/>
+            </a:pPr>
+            <a:r>
+              <a:rPr lang="en-US" sz="2000" dirty="0">
+                <a:solidFill>
+                  <a:srgbClr val="111111"/>
+                </a:solidFill>
+                <a:latin typeface="Calibri" pitchFamily="34" charset="0"/>
+                <a:ea typeface="Calibri" pitchFamily="34" charset="-122"/>
+                <a:cs typeface="Calibri" pitchFamily="34" charset="-120"/>
+              </a:rPr>
+              <a:t>Without the projector (Activity 4): discuss.</a:t>
+            </a:r>
+            <a:endParaRPr lang="en-US" sz="2000" dirty="0"/>
+          </a:p>
+          <a:p>
+            <a:pPr algn="l" marL="342900" indent="-342900">
+              <a:spcAft>
+                <a:spcPts val="800"/>
+              </a:spcAft>
+              <a:buSzPct val="100000"/>
+              <a:buChar char="•"/>
+            </a:pPr>
+            <a:r>
+              <a:rPr lang="en-US" sz="2000" dirty="0">
+                <a:solidFill>
+                  <a:srgbClr val="111111"/>
+                </a:solidFill>
+                <a:latin typeface="Calibri" pitchFamily="34" charset="0"/>
+                <a:ea typeface="Calibri" pitchFamily="34" charset="-122"/>
+                <a:cs typeface="Calibri" pitchFamily="34" charset="-120"/>
+              </a:rPr>
+              <a:t>Without the projector (Activity 5): list efforts.</a:t>
+            </a:r>
+            <a:endParaRPr lang="en-US" sz="2000" dirty="0"/>
           </a:p>
         </p:txBody>
       </p:sp>
@@ -19422,7 +22197,7 @@
             <a:pPr algn="ctr"/>
             <a:fld id="{F7021451-1387-4CA6-816F-3879F97B5CBC}" type="slidenum">
               <a:rPr b="1" lang="en-US"/>
-              <a:t>5</a:t>
+              <a:t>56</a:t>
             </a:fld>
             <a:endParaRPr lang="en-US"/>
           </a:p>
@@ -19436,9 +22211,9 @@
 </p:sld>
 </file>
 
-<file path=ppt/slides/slide50.xml><?xml version="1.0" encoding="utf-8"?>
+<file path=ppt/slides/slide57.xml><?xml version="1.0" encoding="utf-8"?>
 <p:sld xmlns:a="http://schemas.openxmlformats.org/drawingml/2006/main" xmlns:r="http://schemas.openxmlformats.org/officeDocument/2006/relationships" xmlns:p="http://schemas.openxmlformats.org/presentationml/2006/main">
-  <p:cSld name="Slide 50">
+  <p:cSld name="Slide 57">
     <p:spTree>
       <p:nvGrpSpPr>
         <p:cNvPr id="1" name=""/>
@@ -19486,7 +22261,7 @@
                 <a:ea typeface="Calibri" pitchFamily="34" charset="-122"/>
                 <a:cs typeface="Calibri" pitchFamily="34" charset="-120"/>
               </a:rPr>
-              <a:t>TEACHER'S NOTE</a:t>
+              <a:t>REFERENCES</a:t>
             </a:r>
             <a:endParaRPr lang="en-US" sz="1400" dirty="0"/>
           </a:p>
@@ -19509,7 +22284,7 @@
         <p:spPr>
           <a:xfrm>
             <a:off x="0" y="658368"/>
-            <a:ext cx="5120640" cy="5833872"/>
+            <a:ext cx="3840480" cy="5833872"/>
           </a:xfrm>
           <a:prstGeom prst="rect">
             <a:avLst/>
@@ -19524,8 +22299,8 @@
         </p:nvSpPr>
         <p:spPr>
           <a:xfrm>
-            <a:off x="5349240" y="1005840"/>
-            <a:ext cx="6522415" cy="731520"/>
+            <a:off x="4069080" y="1005840"/>
+            <a:ext cx="7802575" cy="731520"/>
           </a:xfrm>
           <a:prstGeom prst="rect">
             <a:avLst/>
@@ -19551,7 +22326,7 @@
                 <a:ea typeface="Times New Roman" pitchFamily="34" charset="-122"/>
                 <a:cs typeface="Times New Roman" pitchFamily="34" charset="-120"/>
               </a:rPr>
-              <a:t>Teacher's Note</a:t>
+              <a:t>References</a:t>
             </a:r>
             <a:endParaRPr lang="en-US" sz="3600" dirty="0"/>
           </a:p>
@@ -19565,8 +22340,8 @@
         </p:nvSpPr>
         <p:spPr>
           <a:xfrm>
-            <a:off x="5349240" y="1783080"/>
-            <a:ext cx="6522415" cy="4663440"/>
+            <a:off x="4069080" y="1783080"/>
+            <a:ext cx="7802575" cy="4663440"/>
           </a:xfrm>
           <a:prstGeom prst="rect">
             <a:avLst/>
@@ -19586,7 +22361,7 @@
               <a:buChar char="•"/>
             </a:pPr>
             <a:r>
-              <a:rPr lang="en-US" sz="2000" dirty="0">
+              <a:rPr lang="en-US" sz="1800" dirty="0">
                 <a:solidFill>
                   <a:srgbClr val="111111"/>
                 </a:solidFill>
@@ -19594,9 +22369,9 @@
                 <a:ea typeface="Calibri" pitchFamily="34" charset="-122"/>
                 <a:cs typeface="Calibri" pitchFamily="34" charset="-120"/>
               </a:rPr>
-              <a:t>Timing: Homework correction, plan, objectives 8 min | Recall, situation, action 10 min | 5 activities 30 min | Board summary (copying) 30 min | Evaluation, remediation 10 min | Homework, next lesson 5 min | Logbook 7 min</a:t>
-            </a:r>
-            <a:endParaRPr lang="en-US" sz="2000" dirty="0"/>
+              <a:t>Geography Syllabus, Forms I–V, MINESEC (2023) — Form 4, Module II: Development and the Management of Primary Resources.</a:t>
+            </a:r>
+            <a:endParaRPr lang="en-US" sz="1800" dirty="0"/>
           </a:p>
           <a:p>
             <a:pPr algn="l" marL="342900" indent="-342900">
@@ -19607,7 +22382,7 @@
               <a:buChar char="•"/>
             </a:pPr>
             <a:r>
-              <a:rPr lang="en-US" sz="2000" dirty="0">
+              <a:rPr lang="en-US" sz="1800" dirty="0">
                 <a:solidFill>
                   <a:srgbClr val="111111"/>
                 </a:solidFill>
@@ -19615,9 +22390,9 @@
                 <a:ea typeface="Calibri" pitchFamily="34" charset="-122"/>
                 <a:cs typeface="Calibri" pitchFamily="34" charset="-120"/>
               </a:rPr>
-              <a:t>Without the projector (Activity 1): use the map.</a:t>
-            </a:r>
-            <a:endParaRPr lang="en-US" sz="2000" dirty="0"/>
+              <a:t>Photo, Activity 2: “Logging truck, Cameroon” by World Resources, CC BY-NC-SA 2.0, via Flickr (https://www.flickr.com/photos/26107309@N05/4764354366)</a:t>
+            </a:r>
+            <a:endParaRPr lang="en-US" sz="1800" dirty="0"/>
           </a:p>
           <a:p>
             <a:pPr algn="l" marL="342900" indent="-342900">
@@ -19628,7 +22403,7 @@
               <a:buChar char="•"/>
             </a:pPr>
             <a:r>
-              <a:rPr lang="en-US" sz="2000" dirty="0">
+              <a:rPr lang="en-US" sz="1800" dirty="0">
                 <a:solidFill>
                   <a:srgbClr val="111111"/>
                 </a:solidFill>
@@ -19636,9 +22411,9 @@
                 <a:ea typeface="Calibri" pitchFamily="34" charset="-122"/>
                 <a:cs typeface="Calibri" pitchFamily="34" charset="-120"/>
               </a:rPr>
-              <a:t>Without the projector (Activity 2): list the steps.</a:t>
-            </a:r>
-            <a:endParaRPr lang="en-US" sz="2000" dirty="0"/>
+              <a:t>Photo, Activity 3: “CBCF Project, Yogyakarta” by CIFOR, CC BY-NC-ND 2.0, via Flickr (https://www.flickr.com/photos/45423546@N07/35977173724)</a:t>
+            </a:r>
+            <a:endParaRPr lang="en-US" sz="1800" dirty="0"/>
           </a:p>
           <a:p>
             <a:pPr algn="l" marL="342900" indent="-342900">
@@ -19649,7 +22424,7 @@
               <a:buChar char="•"/>
             </a:pPr>
             <a:r>
-              <a:rPr lang="en-US" sz="2000" dirty="0">
+              <a:rPr lang="en-US" sz="1800" dirty="0">
                 <a:solidFill>
                   <a:srgbClr val="111111"/>
                 </a:solidFill>
@@ -19657,9 +22432,9 @@
                 <a:ea typeface="Calibri" pitchFamily="34" charset="-122"/>
                 <a:cs typeface="Calibri" pitchFamily="34" charset="-120"/>
               </a:rPr>
-              <a:t>Without the projector (Activity 3): discuss.</a:t>
-            </a:r>
-            <a:endParaRPr lang="en-US" sz="2000" dirty="0"/>
+              <a:t>Photo, Activity 4: “Managed Destruction” by Harlz_, CC BY-NC 2.0, via Flickr (https://www.flickr.com/photos/35169553@N06/4295797661)</a:t>
+            </a:r>
+            <a:endParaRPr lang="en-US" sz="1800" dirty="0"/>
           </a:p>
           <a:p>
             <a:pPr algn="l" marL="342900" indent="-342900">
@@ -19670,7 +22445,7 @@
               <a:buChar char="•"/>
             </a:pPr>
             <a:r>
-              <a:rPr lang="en-US" sz="2000" dirty="0">
+              <a:rPr lang="en-US" sz="1800" dirty="0">
                 <a:solidFill>
                   <a:srgbClr val="111111"/>
                 </a:solidFill>
@@ -19678,9 +22453,9 @@
                 <a:ea typeface="Calibri" pitchFamily="34" charset="-122"/>
                 <a:cs typeface="Calibri" pitchFamily="34" charset="-120"/>
               </a:rPr>
-              <a:t>Without the projector (Activity 4): discuss.</a:t>
-            </a:r>
-            <a:endParaRPr lang="en-US" sz="2000" dirty="0"/>
+              <a:t>Photo, Activity 5: “Haitian Students Breathe New Life into Depleted Pine Forest” by United Nations Photo, CC BY-NC-ND 2.0, via Flickr (https://www.flickr.com/photos/35483578@N03/5860275159)</a:t>
+            </a:r>
+            <a:endParaRPr lang="en-US" sz="1800" dirty="0"/>
           </a:p>
           <a:p>
             <a:pPr algn="l" marL="342900" indent="-342900">
@@ -19691,7 +22466,7 @@
               <a:buChar char="•"/>
             </a:pPr>
             <a:r>
-              <a:rPr lang="en-US" sz="2000" dirty="0">
+              <a:rPr lang="en-US" sz="1800" dirty="0">
                 <a:solidFill>
                   <a:srgbClr val="111111"/>
                 </a:solidFill>
@@ -19699,9 +22474,9 @@
                 <a:ea typeface="Calibri" pitchFamily="34" charset="-122"/>
                 <a:cs typeface="Calibri" pitchFamily="34" charset="-120"/>
               </a:rPr>
-              <a:t>Without the projector (Activity 5): list efforts.</a:t>
-            </a:r>
-            <a:endParaRPr lang="en-US" sz="2000" dirty="0"/>
+              <a:t>Diagrams and animations: drawn for this lesson (Geography Department).</a:t>
+            </a:r>
+            <a:endParaRPr lang="en-US" sz="1800" dirty="0"/>
           </a:p>
         </p:txBody>
       </p:sp>
@@ -19747,332 +22522,7 @@
             <a:pPr algn="ctr"/>
             <a:fld id="{F7021451-1387-4CA6-816F-3879F97B5CBC}" type="slidenum">
               <a:rPr b="1" lang="en-US"/>
-              <a:t>50</a:t>
-            </a:fld>
-            <a:endParaRPr lang="en-US"/>
-          </a:p>
-        </p:txBody>
-      </p:sp>
-    </p:spTree>
-  </p:cSld>
-  <p:clrMapOvr>
-    <a:masterClrMapping/>
-  </p:clrMapOvr>
-</p:sld>
-</file>
-
-<file path=ppt/slides/slide51.xml><?xml version="1.0" encoding="utf-8"?>
-<p:sld xmlns:a="http://schemas.openxmlformats.org/drawingml/2006/main" xmlns:r="http://schemas.openxmlformats.org/officeDocument/2006/relationships" xmlns:p="http://schemas.openxmlformats.org/presentationml/2006/main">
-  <p:cSld name="Slide 51">
-    <p:spTree>
-      <p:nvGrpSpPr>
-        <p:cNvPr id="1" name=""/>
-        <p:cNvGrpSpPr/>
-        <p:nvPr/>
-      </p:nvGrpSpPr>
-      <p:grpSpPr>
-        <a:xfrm>
-          <a:off x="0" y="0"/>
-          <a:ext cx="0" cy="0"/>
-          <a:chOff x="0" y="0"/>
-          <a:chExt cx="0" cy="0"/>
-        </a:xfrm>
-      </p:grpSpPr>
-      <p:sp>
-        <p:nvSpPr>
-          <p:cNvPr id="2" name="Text 0"/>
-          <p:cNvSpPr/>
-          <p:nvPr/>
-        </p:nvSpPr>
-        <p:spPr>
-          <a:xfrm>
-            <a:off x="457200" y="713232"/>
-            <a:ext cx="11368735" cy="274320"/>
-          </a:xfrm>
-          <a:prstGeom prst="rect">
-            <a:avLst/>
-          </a:prstGeom>
-          <a:noFill/>
-          <a:ln/>
-        </p:spPr>
-        <p:txBody>
-          <a:bodyPr wrap="square" lIns="0" tIns="0" rIns="0" bIns="0" rtlCol="0" anchor="ctr"/>
-          <a:lstStyle/>
-          <a:p>
-            <a:pPr algn="r" indent="0" marL="0">
-              <a:buNone/>
-            </a:pPr>
-            <a:r>
-              <a:rPr lang="en-US" sz="1400" b="1" dirty="0">
-                <a:solidFill>
-                  <a:srgbClr val="1C3F6E"/>
-                </a:solidFill>
-                <a:latin typeface="Calibri" pitchFamily="34" charset="0"/>
-                <a:ea typeface="Calibri" pitchFamily="34" charset="-122"/>
-                <a:cs typeface="Calibri" pitchFamily="34" charset="-120"/>
-              </a:rPr>
-              <a:t>REFERENCES</a:t>
-            </a:r>
-            <a:endParaRPr lang="en-US" sz="1400" dirty="0"/>
-          </a:p>
-        </p:txBody>
-      </p:sp>
-      <p:pic>
-        <p:nvPicPr>
-          <p:cNvPr id="3" name="Image 0" descr="/home/claude/f4/img/minesec_sheet.png">    </p:cNvPr>
-          <p:cNvPicPr>
-            <a:picLocks noChangeAspect="1"/>
-          </p:cNvPicPr>
-          <p:nvPr/>
-        </p:nvPicPr>
-        <p:blipFill>
-          <a:blip r:embed="rId1"/>
-          <a:stretch>
-            <a:fillRect/>
-          </a:stretch>
-        </p:blipFill>
-        <p:spPr>
-          <a:xfrm>
-            <a:off x="0" y="658368"/>
-            <a:ext cx="3840480" cy="5833872"/>
-          </a:xfrm>
-          <a:prstGeom prst="rect">
-            <a:avLst/>
-          </a:prstGeom>
-        </p:spPr>
-      </p:pic>
-      <p:sp>
-        <p:nvSpPr>
-          <p:cNvPr id="4" name="Text 1"/>
-          <p:cNvSpPr/>
-          <p:nvPr/>
-        </p:nvSpPr>
-        <p:spPr>
-          <a:xfrm>
-            <a:off x="4069080" y="1005840"/>
-            <a:ext cx="7802575" cy="731520"/>
-          </a:xfrm>
-          <a:prstGeom prst="rect">
-            <a:avLst/>
-          </a:prstGeom>
-          <a:noFill/>
-          <a:ln/>
-        </p:spPr>
-        <p:txBody>
-          <a:bodyPr wrap="square" lIns="0" tIns="0" rIns="0" bIns="0" rtlCol="0" anchor="ctr">
-            <a:normAutofit/>
-          </a:bodyPr>
-          <a:lstStyle/>
-          <a:p>
-            <a:pPr algn="ctr" indent="0" marL="0">
-              <a:buNone/>
-            </a:pPr>
-            <a:r>
-              <a:rPr lang="en-US" sz="3600" b="1" dirty="0">
-                <a:solidFill>
-                  <a:srgbClr val="990011"/>
-                </a:solidFill>
-                <a:latin typeface="Times New Roman" pitchFamily="34" charset="0"/>
-                <a:ea typeface="Times New Roman" pitchFamily="34" charset="-122"/>
-                <a:cs typeface="Times New Roman" pitchFamily="34" charset="-120"/>
-              </a:rPr>
-              <a:t>References</a:t>
-            </a:r>
-            <a:endParaRPr lang="en-US" sz="3600" dirty="0"/>
-          </a:p>
-        </p:txBody>
-      </p:sp>
-      <p:sp>
-        <p:nvSpPr>
-          <p:cNvPr id="5" name="Text 2"/>
-          <p:cNvSpPr/>
-          <p:nvPr/>
-        </p:nvSpPr>
-        <p:spPr>
-          <a:xfrm>
-            <a:off x="4069080" y="1783080"/>
-            <a:ext cx="7802575" cy="4663440"/>
-          </a:xfrm>
-          <a:prstGeom prst="rect">
-            <a:avLst/>
-          </a:prstGeom>
-          <a:noFill/>
-          <a:ln/>
-        </p:spPr>
-        <p:txBody>
-          <a:bodyPr wrap="square" lIns="0" tIns="0" rIns="0" bIns="0" rtlCol="0" anchor="t"/>
-          <a:lstStyle/>
-          <a:p>
-            <a:pPr algn="l" marL="342900" indent="-342900">
-              <a:spcAft>
-                <a:spcPts val="800"/>
-              </a:spcAft>
-              <a:buSzPct val="100000"/>
-              <a:buChar char="•"/>
-            </a:pPr>
-            <a:r>
-              <a:rPr lang="en-US" sz="1800" dirty="0">
-                <a:solidFill>
-                  <a:srgbClr val="111111"/>
-                </a:solidFill>
-                <a:latin typeface="Calibri" pitchFamily="34" charset="0"/>
-                <a:ea typeface="Calibri" pitchFamily="34" charset="-122"/>
-                <a:cs typeface="Calibri" pitchFamily="34" charset="-120"/>
-              </a:rPr>
-              <a:t>Geography Syllabus, Forms I–V, MINESEC (2023) — Form 4, Module II: Development and the Management of Primary Resources.</a:t>
-            </a:r>
-            <a:endParaRPr lang="en-US" sz="1800" dirty="0"/>
-          </a:p>
-          <a:p>
-            <a:pPr algn="l" marL="342900" indent="-342900">
-              <a:spcAft>
-                <a:spcPts val="800"/>
-              </a:spcAft>
-              <a:buSzPct val="100000"/>
-              <a:buChar char="•"/>
-            </a:pPr>
-            <a:r>
-              <a:rPr lang="en-US" sz="1800" dirty="0">
-                <a:solidFill>
-                  <a:srgbClr val="111111"/>
-                </a:solidFill>
-                <a:latin typeface="Calibri" pitchFamily="34" charset="0"/>
-                <a:ea typeface="Calibri" pitchFamily="34" charset="-122"/>
-                <a:cs typeface="Calibri" pitchFamily="34" charset="-120"/>
-              </a:rPr>
-              <a:t>Photo, Activity 2: “Logging truck, Cameroon” by World Resources, CC BY-NC-SA 2.0, via Flickr (https://www.flickr.com/photos/26107309@N05/4764354366)</a:t>
-            </a:r>
-            <a:endParaRPr lang="en-US" sz="1800" dirty="0"/>
-          </a:p>
-          <a:p>
-            <a:pPr algn="l" marL="342900" indent="-342900">
-              <a:spcAft>
-                <a:spcPts val="800"/>
-              </a:spcAft>
-              <a:buSzPct val="100000"/>
-              <a:buChar char="•"/>
-            </a:pPr>
-            <a:r>
-              <a:rPr lang="en-US" sz="1800" dirty="0">
-                <a:solidFill>
-                  <a:srgbClr val="111111"/>
-                </a:solidFill>
-                <a:latin typeface="Calibri" pitchFamily="34" charset="0"/>
-                <a:ea typeface="Calibri" pitchFamily="34" charset="-122"/>
-                <a:cs typeface="Calibri" pitchFamily="34" charset="-120"/>
-              </a:rPr>
-              <a:t>Photo, Activity 3: “CBCF Project, Yogyakarta” by CIFOR, CC BY-NC-ND 2.0, via Flickr (https://www.flickr.com/photos/45423546@N07/35977173724)</a:t>
-            </a:r>
-            <a:endParaRPr lang="en-US" sz="1800" dirty="0"/>
-          </a:p>
-          <a:p>
-            <a:pPr algn="l" marL="342900" indent="-342900">
-              <a:spcAft>
-                <a:spcPts val="800"/>
-              </a:spcAft>
-              <a:buSzPct val="100000"/>
-              <a:buChar char="•"/>
-            </a:pPr>
-            <a:r>
-              <a:rPr lang="en-US" sz="1800" dirty="0">
-                <a:solidFill>
-                  <a:srgbClr val="111111"/>
-                </a:solidFill>
-                <a:latin typeface="Calibri" pitchFamily="34" charset="0"/>
-                <a:ea typeface="Calibri" pitchFamily="34" charset="-122"/>
-                <a:cs typeface="Calibri" pitchFamily="34" charset="-120"/>
-              </a:rPr>
-              <a:t>Photo, Activity 4: “Managed Destruction” by Harlz_, CC BY-NC 2.0, via Flickr (https://www.flickr.com/photos/35169553@N06/4295797661)</a:t>
-            </a:r>
-            <a:endParaRPr lang="en-US" sz="1800" dirty="0"/>
-          </a:p>
-          <a:p>
-            <a:pPr algn="l" marL="342900" indent="-342900">
-              <a:spcAft>
-                <a:spcPts val="800"/>
-              </a:spcAft>
-              <a:buSzPct val="100000"/>
-              <a:buChar char="•"/>
-            </a:pPr>
-            <a:r>
-              <a:rPr lang="en-US" sz="1800" dirty="0">
-                <a:solidFill>
-                  <a:srgbClr val="111111"/>
-                </a:solidFill>
-                <a:latin typeface="Calibri" pitchFamily="34" charset="0"/>
-                <a:ea typeface="Calibri" pitchFamily="34" charset="-122"/>
-                <a:cs typeface="Calibri" pitchFamily="34" charset="-120"/>
-              </a:rPr>
-              <a:t>Photo, Activity 5: “Haitian Students Breathe New Life into Depleted Pine Forest” by United Nations Photo, CC BY-NC-ND 2.0, via Flickr (https://www.flickr.com/photos/35483578@N03/5860275159)</a:t>
-            </a:r>
-            <a:endParaRPr lang="en-US" sz="1800" dirty="0"/>
-          </a:p>
-          <a:p>
-            <a:pPr algn="l" marL="342900" indent="-342900">
-              <a:spcAft>
-                <a:spcPts val="800"/>
-              </a:spcAft>
-              <a:buSzPct val="100000"/>
-              <a:buChar char="•"/>
-            </a:pPr>
-            <a:r>
-              <a:rPr lang="en-US" sz="1800" dirty="0">
-                <a:solidFill>
-                  <a:srgbClr val="111111"/>
-                </a:solidFill>
-                <a:latin typeface="Calibri" pitchFamily="34" charset="0"/>
-                <a:ea typeface="Calibri" pitchFamily="34" charset="-122"/>
-                <a:cs typeface="Calibri" pitchFamily="34" charset="-120"/>
-              </a:rPr>
-              <a:t>Diagrams and animations: drawn for this lesson (Geography Department).</a:t>
-            </a:r>
-            <a:endParaRPr lang="en-US" sz="1800" dirty="0"/>
-          </a:p>
-        </p:txBody>
-      </p:sp>
-      <p:sp>
-        <p:nvSpPr>
-          <p:cNvPr id="25" name="Slide Number Placeholder 0"/>
-          <p:cNvSpPr>
-            <a:spLocks noGrp="1"/>
-          </p:cNvSpPr>
-          <p:nvPr>
-            <p:ph type="sldNum" sz="quarter" idx="4294967295"/>
-          </p:nvPr>
-        </p:nvSpPr>
-        <p:spPr>
-          <a:xfrm>
-            <a:off x="27432" y="91440"/>
-            <a:ext cx="585216" cy="475488"/>
-          </a:xfrm>
-          <a:prstGeom prst="rect">
-            <a:avLst/>
-          </a:prstGeom>
-          <a:extLst>
-            <a:ext uri="{C572A759-6A51-4108-AA02-DFA0A04FC94B}">
-              <ma14:wrappingTextBoxFlag xmlns:ma14="http://schemas.microsoft.com/office/mac/drawingml/2011/main" val="0"/>
-            </a:ext>
-          </a:extLst>
-        </p:spPr>
-        <p:txBody>
-          <a:bodyPr/>
-          <a:lstStyle>
-            <a:lvl1pPr>
-              <a:defRPr sz="2000">
-                <a:solidFill>
-                  <a:srgbClr val="FFFFFF"/>
-                </a:solidFill>
-                <a:latin typeface="Calibri"/>
-                <a:ea typeface="Calibri"/>
-                <a:cs typeface="Calibri"/>
-              </a:defRPr>
-            </a:lvl1pPr>
-          </a:lstStyle>
-          <a:p>
-            <a:pPr algn="ctr"/>
-            <a:fld id="{F7021451-1387-4CA6-816F-3879F97B5CBC}" type="slidenum">
-              <a:rPr b="1" lang="en-US"/>
-              <a:t>51</a:t>
+              <a:t>57</a:t>
             </a:fld>
             <a:endParaRPr lang="en-US"/>
           </a:p>
